--- a/산출물/실전반/이론/07회차/실전반_07일차.pptx
+++ b/산출물/실전반/이론/07회차/실전반_07일차.pptx
@@ -912,7 +912,7 @@
           <a:lstStyle/>
           <a:p>
             <a:r>
-              <a:t>경보는 자기 패턴을 시작 조건으로 가진 정의를 찾아간다고 했죠. 그런데 같은 패턴을 시작 조건으로 가진 정의가 둘이라면 어떻게 될까요? 이걸 보려면 앞 회차에서 본 등록과 배포의 차이를 떠올려야 해요. 화면 첫 칸, 등록은 판본을 저장하는 일입니다. 둘째 칸, 배포를 해야 그 판본이 경보를 받고요. 이렇게 배포해서 경보를 받게 된 정의를 화면에서는 흐름이라고 부릅니다. 시스템에 처음부터 있던 것은 기준 흐름, 내가 배포한 것은 내 흐름이에요. 답은 셋째 칸에 있습니다. 경보는 그 패턴을 시작 조건으로 가진 흐름 가운데 가장 최근에 배포한 것이 받아요. 배포된 흐름이 하나도 없으면 경보는 기준 흐름 쪽으로 갑니다. 기준 흐름은 원래 설비 경보를 받던 흐름이라서, 정기 점검이나 재고 부족처럼 다루지 않는 경보는 사람이 검토하는 자리로 보내요. 결국 배포는 경보가 가는 길을 바꾸는 일이에요. 등록과 배포를 나눠 둔 까닭도 여기 있습니다. 새 판본을 등록해 두기만 하면 지금 경보를 받는 흐름은 그대로 돌아가니까, 준비가 끝났을 때 배포 한 번으로 길을 바꿀 수 있죠. 여러 사람이 한 시스템을 같이 쓰면서 각자 흐름을 배포하면 어떻게 될까요? 마지막에 배포한 사람의 흐름이 경보를 가져갑니다. 그래서 넷째 칸의 되돌리기가 필요해요. HYD의 기준 흐름으로 되돌리기는 같은 사용 공간에 배포된 사용자 흐름들을 경보 경로에서 내리는 동작입니다. 내 것 하나만 되돌리는 동작으로 생각하면 안 돼요. 공용 환경에서는 다른 사람의 배포에도 영향을 주므로, 강사에게 배정된 환경을 확인하고 진행 순서와 되돌릴 시점을 운영자와 맞춥니다. 등록해 둔 판본은 지워지지 않으니까 필요하면 다시 배포하면 되고요. 실습에서 흐름을 배포하고 실행할 때 이 규칙을 그대로 겪게 될 거예요.</a:t>
+              <a:t>경보는 자기 패턴을 시작 조건으로 가진 정의를 찾아간다고 했죠. 그런데 같은 패턴을 시작 조건으로 가진 정의가 둘이라면 어떻게 될까요? 이걸 보려면 앞 회차에서 본 등록과 배포의 차이를 떠올려야 해요. 화면 첫 칸, 등록은 판본을 저장하는 일입니다. 둘째 칸, 배포를 해야 그 판본이 경보를 받고요. 이렇게 배포해서 경보를 받게 된 정의를 화면에서는 흐름이라고 부릅니다. 시스템에 처음부터 있던 것은 기준 흐름, 내가 배포한 것은 내 흐름이에요. 답은 셋째 칸에 있습니다. 경보는 그 패턴을 시작 조건으로 가진 흐름 가운데 가장 최근에 배포한 것이 받아요. 배포된 흐름이 하나도 없으면 경보는 기준 흐름 쪽으로 갑니다. 기준 흐름은 원래 설비 경보를 받던 흐름이라서, 정기 점검이나 재고 부족처럼 다루지 않는 경보는 사람이 검토하는 자리로 보내요. 결국 배포는 경보가 가는 길을 바꾸는 일이에요. 등록과 배포를 나눠 둔 까닭도 여기 있습니다. 새 판본을 등록해 두기만 하면 지금 경보를 받는 흐름은 그대로 돌아가니까, 준비가 끝났을 때 배포 한 번으로 길을 바꿀 수 있죠. 여러 사람이 같은 사용 공간을 같이 쓰면서 각자 흐름을 배포하면 어떻게 될까요? 마지막에 배포한 사람의 흐름이 경보를 가져갑니다. 그래서 넷째 칸의 되돌리기가 필요해요. HYD의 기준 흐름으로 되돌리기는 같은 사용 공간에 배포된 사용자 흐름들을 경보 경로에서 내리는 동작입니다. 내 것 하나만 되돌리는 동작으로 생각하면 안 돼요. 공용 환경에서는 다른 사람의 배포에도 영향을 주므로, 강사에게 배정된 환경을 확인하고 진행 순서와 되돌릴 시점을 운영자와 맞춥니다. 등록해 둔 판본은 지워지지 않으니까 필요하면 다시 배포하면 되고요. 실습에서 흐름을 배포하고 실행할 때 이 규칙을 그대로 겪게 될 거예요.</a:t>
             </a:r>
           </a:p>
         </p:txBody>
@@ -3292,7 +3292,7 @@
           <a:lstStyle/>
           <a:p>
             <a:r>
-              <a:t>공급사는 셋이었는데, 왜 하필 B-OEM이었을까요? 공급사 셋을 견준 추천안을 보겠습니다. 가운데 칸에 씰 키트 6개를 샀을 때의 금액, 납기, 불량률이 적혀 있어요. 맨 아래 C트레이딩부터 볼게요. 금액이 가장 싸고 납기도 가장 빠릅니다. 그런데 승인된 공급사가 아니죠. 핵심 부품은 승인 공급사에서만 산다는 회사 규정이 있어서 제외됐습니다. 가격이 싸다고 품질이 나쁘다는 뜻은 아니에요. 다만 이 공장은 핵심 부품을 미리 검증해 둔 곳에서만 사도록 정해 둔 거예요. 가운데 A정밀은 B-OEM보다 꽤 싸고 납기도 빨라서 괜찮아 보여요. 하지만 불량률이 회사 기준인 10퍼센트를 넘습니다. 그런 공급사에서 사면 이 공장 규정상 들어온 물건을 하나하나 검사하도록 요구합니다. 전수 검사도 모든 위험이 사라진다는 보장은 아니에요. 그래서 입고 검사를 전수 검사로 강화해야 하고, 판정에서는 그만큼 감점을 받았습니다. 그런데 화면의 금액만 보면 이상하죠. 검사 비용을 더해도 A정밀이 B-OEM보다 싸니까요. 판정은 금액의 합으로 나지 않았습니다. 에이전트는 금액뿐 아니라 부품 품질이 떨어지는 득실, 전수 검사의 감점, 납기와 경고까지 점수로 함께 매겼어요. 그렇게 매기니 품질 득실과 검사 감점에서 뒤진 A정밀이 B-OEM에 진 겁니다. 추천은 맨 위, 금액이 가장 큰 순정 공급사 B-OEM이었어요. 불량률은 셋 가운데 가장 낮습니다. 다만 금액이 회사의 전결 기준 300만 원을 넘었죠. 전결 기준은 담당자가 혼자 승인할 수 있는 금액의 선이에요. 이 공장은 그 선을 넘어도 승인은 구매 담당이 한 번 하되, 추천안에 전결 기준 초과를 표시하고 결과를 구매팀장에게도 보고하도록 정해 두었습니다. 가장 싼 곳이 아닌 곳을 추천했고, 그 추천에도 경고가 붙어 있었던 거예요. 구매 담당은 이 비교와 경고를 다 보고 승인했습니다. 비교는 에이전트가 맡고, 그 비교를 받아들일지는 사람이 정한 거죠.</a:t>
+              <a:t>공급사는 셋이었는데, 왜 하필 B-OEM이었을까요? 공급사 셋을 견준 추천안을 보겠습니다. 가운데 칸에 씰 키트 6개를 샀을 때의 금액, 납기, 불량률이 적혀 있어요. 맨 아래 C트레이딩부터 볼게요. 금액이 가장 싸고 납기도 가장 빠릅니다. 그런데 승인된 공급사가 아니죠. 핵심 부품은 승인 공급사에서만 산다는 회사 규정이 있어서 제외됐습니다. 가격이 싸다고 품질이 나쁘다는 뜻은 아니에요. 다만 이 공장은 핵심 부품을 미리 검증해 둔 곳에서만 사도록 정해 둔 거예요. 가운데 A정밀은 B-OEM보다 꽤 싸고 납기도 빨라서 괜찮아 보여요. 하지만 불량률이 회사 기준인 10퍼센트를 넘습니다. 그런 공급사에서 사면 이 공장 규정상 들어온 물건을 하나하나 검사하도록 요구합니다. 전수 검사도 모든 위험이 사라진다는 보장은 아니에요. 그래서 입고 검사를 전수 검사로 강화해야 하고, 판정에서는 그만큼 감점을 받았습니다. 그런데 화면의 금액만 보면 이상하죠. 검사 비용을 더해도 A정밀이 B-OEM보다 싸니까요. 판정은 금액의 합으로 나지 않았습니다. 에이전트는 금액뿐 아니라 부품 품질이 떨어지는 득실, 전수 검사의 감점, 납기와 경고까지 점수로 함께 매겼어요. 그렇게 매기니 품질 득실과 검사 감점에서 뒤진 A정밀이 B-OEM에 진 겁니다. 추천은 맨 위, 금액이 가장 큰 순정 공급사 B-OEM이었어요. 불량률은 셋 가운데 가장 낮습니다. 다만 금액이 회사의 전결 기준 300만 원을 넘었죠. 전결 기준은 담당자가 혼자 승인할 수 있는 금액의 선이에요. 이 공장은 그 선을 넘어도 승인은 구매 담당이 한 번 하되, 추천안에 전결 기준 초과를 표시하고 결과를 구매팀장에게도 보고하도록 정해 두었습니다. 가장 싼 곳이 아닌 곳을 추천했고, 그 추천에도 경고가 붙어 있었던 거예요. 기록에는 이 비교와 경고를 담은 추천안, 그리고 구매 담당의 승인 결정이 남아 있습니다. 담당자가 실제로 무엇을 검토했는지까지 단정하지는 않습니다. 비교의 근거와 승인 결정을 나누어 읽어야 합니다.</a:t>
             </a:r>
           </a:p>
         </p:txBody>
@@ -22288,7 +22288,7 @@
                 <a:ea typeface="맑은 고딕"/>
                 <a:cs typeface="맑은 고딕"/>
               </a:rPr>
-              <a:t>냉각 명령 · 정비 오더 · 발주</a:t>
+              <a:t>냉각 명령·정비 오더·발주</a:t>
             </a:r>
           </a:p>
         </p:txBody>
@@ -22532,8 +22532,8 @@
         </p:nvSpPr>
         <p:spPr>
           <a:xfrm>
-            <a:off x="7350439" y="3093140"/>
-            <a:ext cx="1636424" cy="546353"/>
+            <a:off x="7350439" y="3550000"/>
+            <a:ext cx="2430000" cy="546353"/>
           </a:xfrm>
           <a:prstGeom prst="rect">
             <a:avLst/>
@@ -29871,16 +29871,207 @@
         </p:nvSpPr>
         <p:spPr>
           <a:xfrm>
-            <a:off x="548640" y="2101215"/>
-            <a:ext cx="1911644" cy="3780281"/>
+            <a:off x="594360" y="1874519"/>
+            <a:ext cx="2514600" cy="2788920"/>
           </a:xfrm>
           <a:prstGeom prst="roundRect">
             <a:avLst>
-              <a:gd name="adj" fmla="val 5000"/>
+              <a:gd name="adj" fmla="val 6000"/>
             </a:avLst>
           </a:prstGeom>
           <a:solidFill>
-            <a:srgbClr val="F3F6F9"/>
+            <a:srgbClr val="FFFFFF"/>
+          </a:solidFill>
+          <a:ln w="15875">
+            <a:solidFill>
+              <a:srgbClr val="D3D9E1"/>
+            </a:solidFill>
+          </a:ln>
+        </p:spPr>
+        <p:txBody>
+          <a:bodyPr rtlCol="0" anchor="ctr"/>
+          <a:lstStyle/>
+          <a:p>
+            <a:pPr algn="ctr"/>
+          </a:p>
+        </p:txBody>
+      </p:sp>
+      <p:sp>
+        <p:nvSpPr>
+          <p:cNvPr id="7" name="TextBox 6"/>
+          <p:cNvSpPr txBox="1"/>
+          <p:nvPr/>
+        </p:nvSpPr>
+        <p:spPr>
+          <a:xfrm>
+            <a:off x="758952" y="2075688"/>
+            <a:ext cx="2185416" cy="411480"/>
+          </a:xfrm>
+          <a:prstGeom prst="rect">
+            <a:avLst/>
+          </a:prstGeom>
+          <a:noFill/>
+        </p:spPr>
+        <p:txBody>
+          <a:bodyPr wrap="square" anchor="t"/>
+          <a:lstStyle/>
+          <a:p>
+            <a:pPr algn="l" eaLnBrk="0">
+              <a:lnSpc>
+                <a:spcPct val="110000"/>
+              </a:lnSpc>
+            </a:pPr>
+            <a:r>
+              <a:rPr sz="2100" b="1">
+                <a:solidFill>
+                  <a:srgbClr val="13294B"/>
+                </a:solidFill>
+                <a:latin typeface="맑은 고딕"/>
+                <a:ea typeface="맑은 고딕"/>
+                <a:cs typeface="맑은 고딕"/>
+              </a:rPr>
+              <a:t>연결</a:t>
+            </a:r>
+          </a:p>
+        </p:txBody>
+      </p:sp>
+      <p:sp>
+        <p:nvSpPr>
+          <p:cNvPr id="8" name="TextBox 7"/>
+          <p:cNvSpPr txBox="1"/>
+          <p:nvPr/>
+        </p:nvSpPr>
+        <p:spPr>
+          <a:xfrm>
+            <a:off x="758952" y="2743200"/>
+            <a:ext cx="2185416" cy="1234440"/>
+          </a:xfrm>
+          <a:prstGeom prst="rect">
+            <a:avLst/>
+          </a:prstGeom>
+          <a:noFill/>
+        </p:spPr>
+        <p:txBody>
+          <a:bodyPr wrap="square" anchor="t"/>
+          <a:lstStyle/>
+          <a:p>
+            <a:pPr algn="l" eaLnBrk="0">
+              <a:lnSpc>
+                <a:spcPct val="110000"/>
+              </a:lnSpc>
+            </a:pPr>
+            <a:r>
+              <a:rPr sz="1500" b="0">
+                <a:solidFill>
+                  <a:srgbClr val="13294B"/>
+                </a:solidFill>
+                <a:latin typeface="맑은 고딕"/>
+                <a:ea typeface="맑은 고딕"/>
+                <a:cs typeface="맑은 고딕"/>
+              </a:rPr>
+              <a:t>BPMN · PM_DUE</a:t>
+            </a:r>
+          </a:p>
+          <a:p>
+            <a:pPr algn="l" eaLnBrk="0">
+              <a:lnSpc>
+                <a:spcPct val="110000"/>
+              </a:lnSpc>
+            </a:pPr>
+            <a:r>
+              <a:rPr sz="1500" b="0">
+                <a:solidFill>
+                  <a:srgbClr val="13294B"/>
+                </a:solidFill>
+                <a:latin typeface="맑은 고딕"/>
+                <a:ea typeface="맑은 고딕"/>
+                <a:cs typeface="맑은 고딕"/>
+              </a:rPr>
+              <a:t>정비 계획 에이전트</a:t>
+            </a:r>
+          </a:p>
+          <a:p>
+            <a:pPr algn="l" eaLnBrk="0">
+              <a:lnSpc>
+                <a:spcPct val="110000"/>
+              </a:lnSpc>
+            </a:pPr>
+            <a:r>
+              <a:rPr sz="1500" b="0">
+                <a:solidFill>
+                  <a:srgbClr val="13294B"/>
+                </a:solidFill>
+                <a:latin typeface="맑은 고딕"/>
+                <a:ea typeface="맑은 고딕"/>
+                <a:cs typeface="맑은 고딕"/>
+              </a:rPr>
+              <a:t>설비보전팀장 · 10분</a:t>
+            </a:r>
+          </a:p>
+          <a:p>
+            <a:pPr algn="l" eaLnBrk="0">
+              <a:lnSpc>
+                <a:spcPct val="110000"/>
+              </a:lnSpc>
+            </a:pPr>
+            <a:r>
+              <a:rPr sz="1500" b="0">
+                <a:solidFill>
+                  <a:srgbClr val="13294B"/>
+                </a:solidFill>
+                <a:latin typeface="맑은 고딕"/>
+                <a:ea typeface="맑은 고딕"/>
+                <a:cs typeface="맑은 고딕"/>
+              </a:rPr>
+              <a:t>CMMS 오더와 공지</a:t>
+            </a:r>
+          </a:p>
+        </p:txBody>
+      </p:sp>
+      <p:sp>
+        <p:nvSpPr>
+          <p:cNvPr id="9" name="TextBox 8"/>
+          <p:cNvSpPr txBox="1"/>
+          <p:nvPr/>
+        </p:nvSpPr>
+        <p:spPr>
+          <a:xfrm>
+            <a:off x="758952" y="4133087"/>
+            <a:ext cx="2185416" cy="329184"/>
+          </a:xfrm>
+          <a:prstGeom prst="rect">
+            <a:avLst/>
+          </a:prstGeom>
+          <a:noFill/>
+        </p:spPr>
+        <p:txBody>
+          <a:bodyPr wrap="square" anchor="t"/>
+          <a:lstStyle/>
+          <a:p>
+            <a:pPr algn="l" eaLnBrk="0">
+              <a:lnSpc>
+                <a:spcPct val="110000"/>
+              </a:lnSpc>
+            </a:pPr>
+          </a:p>
+        </p:txBody>
+      </p:sp>
+      <p:sp>
+        <p:nvSpPr>
+          <p:cNvPr id="10" name="Right Arrow 9"/>
+          <p:cNvSpPr/>
+          <p:nvPr/>
+        </p:nvSpPr>
+        <p:spPr>
+          <a:xfrm>
+            <a:off x="3172968" y="3154680"/>
+            <a:ext cx="201168" cy="164592"/>
+          </a:xfrm>
+          <a:prstGeom prst="rightArrow">
+            <a:avLst/>
+          </a:prstGeom>
+          <a:solidFill>
+            <a:srgbClr val="1A6FC4"/>
           </a:solidFill>
           <a:ln>
             <a:noFill/>
@@ -29896,20 +30087,195 @@
       </p:sp>
       <p:sp>
         <p:nvSpPr>
-          <p:cNvPr id="7" name="Oval 6"/>
+          <p:cNvPr id="11" name="Rounded Rectangle 10"/>
           <p:cNvSpPr/>
           <p:nvPr/>
         </p:nvSpPr>
         <p:spPr>
           <a:xfrm>
-            <a:off x="1138702" y="2284095"/>
-            <a:ext cx="731520" cy="731520"/>
-          </a:xfrm>
-          <a:prstGeom prst="ellipse">
-            <a:avLst/>
+            <a:off x="3429000" y="1874519"/>
+            <a:ext cx="2514600" cy="2788920"/>
+          </a:xfrm>
+          <a:prstGeom prst="roundRect">
+            <a:avLst>
+              <a:gd name="adj" fmla="val 6000"/>
+            </a:avLst>
           </a:prstGeom>
           <a:solidFill>
             <a:srgbClr val="FFFFFF"/>
+          </a:solidFill>
+          <a:ln w="15875">
+            <a:solidFill>
+              <a:srgbClr val="D3D9E1"/>
+            </a:solidFill>
+          </a:ln>
+        </p:spPr>
+        <p:txBody>
+          <a:bodyPr rtlCol="0" anchor="ctr"/>
+          <a:lstStyle/>
+          <a:p>
+            <a:pPr algn="ctr"/>
+          </a:p>
+        </p:txBody>
+      </p:sp>
+      <p:sp>
+        <p:nvSpPr>
+          <p:cNvPr id="12" name="TextBox 11"/>
+          <p:cNvSpPr txBox="1"/>
+          <p:nvPr/>
+        </p:nvSpPr>
+        <p:spPr>
+          <a:xfrm>
+            <a:off x="3593592" y="2075688"/>
+            <a:ext cx="2185416" cy="411480"/>
+          </a:xfrm>
+          <a:prstGeom prst="rect">
+            <a:avLst/>
+          </a:prstGeom>
+          <a:noFill/>
+        </p:spPr>
+        <p:txBody>
+          <a:bodyPr wrap="square" anchor="t"/>
+          <a:lstStyle/>
+          <a:p>
+            <a:pPr algn="l" eaLnBrk="0">
+              <a:lnSpc>
+                <a:spcPct val="110000"/>
+              </a:lnSpc>
+            </a:pPr>
+            <a:r>
+              <a:rPr sz="2100" b="1">
+                <a:solidFill>
+                  <a:srgbClr val="13294B"/>
+                </a:solidFill>
+                <a:latin typeface="맑은 고딕"/>
+                <a:ea typeface="맑은 고딕"/>
+                <a:cs typeface="맑은 고딕"/>
+              </a:rPr>
+              <a:t>검사</a:t>
+            </a:r>
+          </a:p>
+        </p:txBody>
+      </p:sp>
+      <p:sp>
+        <p:nvSpPr>
+          <p:cNvPr id="13" name="TextBox 12"/>
+          <p:cNvSpPr txBox="1"/>
+          <p:nvPr/>
+        </p:nvSpPr>
+        <p:spPr>
+          <a:xfrm>
+            <a:off x="3593592" y="2743200"/>
+            <a:ext cx="2185416" cy="1234440"/>
+          </a:xfrm>
+          <a:prstGeom prst="rect">
+            <a:avLst/>
+          </a:prstGeom>
+          <a:noFill/>
+        </p:spPr>
+        <p:txBody>
+          <a:bodyPr wrap="square" anchor="t"/>
+          <a:lstStyle/>
+          <a:p>
+            <a:pPr algn="l" eaLnBrk="0">
+              <a:lnSpc>
+                <a:spcPct val="110000"/>
+              </a:lnSpc>
+            </a:pPr>
+            <a:r>
+              <a:rPr sz="1500" b="0">
+                <a:solidFill>
+                  <a:srgbClr val="13294B"/>
+                </a:solidFill>
+                <a:latin typeface="맑은 고딕"/>
+                <a:ea typeface="맑은 고딕"/>
+                <a:cs typeface="맑은 고딕"/>
+              </a:rPr>
+              <a:t>사전 검사로</a:t>
+            </a:r>
+          </a:p>
+          <a:p>
+            <a:pPr algn="l" eaLnBrk="0">
+              <a:lnSpc>
+                <a:spcPct val="110000"/>
+              </a:lnSpc>
+            </a:pPr>
+            <a:r>
+              <a:rPr sz="1500" b="0">
+                <a:solidFill>
+                  <a:srgbClr val="13294B"/>
+                </a:solidFill>
+                <a:latin typeface="맑은 고딕"/>
+                <a:ea typeface="맑은 고딕"/>
+                <a:cs typeface="맑은 고딕"/>
+              </a:rPr>
+              <a:t>승인 없는 효과 경로와</a:t>
+            </a:r>
+          </a:p>
+          <a:p>
+            <a:pPr algn="l" eaLnBrk="0">
+              <a:lnSpc>
+                <a:spcPct val="110000"/>
+              </a:lnSpc>
+            </a:pPr>
+            <a:r>
+              <a:rPr sz="1500" b="0">
+                <a:solidFill>
+                  <a:srgbClr val="13294B"/>
+                </a:solidFill>
+                <a:latin typeface="맑은 고딕"/>
+                <a:ea typeface="맑은 고딕"/>
+                <a:cs typeface="맑은 고딕"/>
+              </a:rPr>
+              <a:t>빠진 연결을 찾는다</a:t>
+            </a:r>
+          </a:p>
+        </p:txBody>
+      </p:sp>
+      <p:sp>
+        <p:nvSpPr>
+          <p:cNvPr id="14" name="TextBox 13"/>
+          <p:cNvSpPr txBox="1"/>
+          <p:nvPr/>
+        </p:nvSpPr>
+        <p:spPr>
+          <a:xfrm>
+            <a:off x="3593592" y="4133087"/>
+            <a:ext cx="2185416" cy="329184"/>
+          </a:xfrm>
+          <a:prstGeom prst="rect">
+            <a:avLst/>
+          </a:prstGeom>
+          <a:noFill/>
+        </p:spPr>
+        <p:txBody>
+          <a:bodyPr wrap="square" anchor="t"/>
+          <a:lstStyle/>
+          <a:p>
+            <a:pPr algn="l" eaLnBrk="0">
+              <a:lnSpc>
+                <a:spcPct val="110000"/>
+              </a:lnSpc>
+            </a:pPr>
+          </a:p>
+        </p:txBody>
+      </p:sp>
+      <p:sp>
+        <p:nvSpPr>
+          <p:cNvPr id="15" name="Right Arrow 14"/>
+          <p:cNvSpPr/>
+          <p:nvPr/>
+        </p:nvSpPr>
+        <p:spPr>
+          <a:xfrm>
+            <a:off x="6007608" y="3154680"/>
+            <a:ext cx="201168" cy="164592"/>
+          </a:xfrm>
+          <a:prstGeom prst="rightArrow">
+            <a:avLst/>
+          </a:prstGeom>
+          <a:solidFill>
+            <a:srgbClr val="1A6FC4"/>
           </a:solidFill>
           <a:ln>
             <a:noFill/>
@@ -29923,40 +30289,49 @@
           </a:p>
         </p:txBody>
       </p:sp>
-      <p:pic>
-        <p:nvPicPr>
-          <p:cNvPr id="8" name="아이콘:plug-connected" descr="plug-connected_13294B_1.6.png"/>
-          <p:cNvPicPr>
-            <a:picLocks noChangeAspect="1"/>
-          </p:cNvPicPr>
-          <p:nvPr/>
-        </p:nvPicPr>
-        <p:blipFill>
-          <a:blip r:embed="rId3"/>
-          <a:stretch>
-            <a:fillRect/>
-          </a:stretch>
-        </p:blipFill>
-        <p:spPr>
-          <a:xfrm>
-            <a:off x="1292321" y="2437714"/>
-            <a:ext cx="424281" cy="424281"/>
-          </a:xfrm>
-          <a:prstGeom prst="rect">
-            <a:avLst/>
-          </a:prstGeom>
-        </p:spPr>
-      </p:pic>
-      <p:sp>
-        <p:nvSpPr>
-          <p:cNvPr id="9" name="TextBox 8"/>
-          <p:cNvSpPr txBox="1"/>
-          <p:nvPr/>
-        </p:nvSpPr>
-        <p:spPr>
-          <a:xfrm>
-            <a:off x="621792" y="3088767"/>
-            <a:ext cx="1765340" cy="2719577"/>
+      <p:sp>
+        <p:nvSpPr>
+          <p:cNvPr id="16" name="Rounded Rectangle 15"/>
+          <p:cNvSpPr/>
+          <p:nvPr/>
+        </p:nvSpPr>
+        <p:spPr>
+          <a:xfrm>
+            <a:off x="6263640" y="1874519"/>
+            <a:ext cx="2514600" cy="2788920"/>
+          </a:xfrm>
+          <a:prstGeom prst="roundRect">
+            <a:avLst>
+              <a:gd name="adj" fmla="val 6000"/>
+            </a:avLst>
+          </a:prstGeom>
+          <a:solidFill>
+            <a:srgbClr val="FFFFFF"/>
+          </a:solidFill>
+          <a:ln w="15875">
+            <a:solidFill>
+              <a:srgbClr val="D3D9E1"/>
+            </a:solidFill>
+          </a:ln>
+        </p:spPr>
+        <p:txBody>
+          <a:bodyPr rtlCol="0" anchor="ctr"/>
+          <a:lstStyle/>
+          <a:p>
+            <a:pPr algn="ctr"/>
+          </a:p>
+        </p:txBody>
+      </p:sp>
+      <p:sp>
+        <p:nvSpPr>
+          <p:cNvPr id="17" name="TextBox 16"/>
+          <p:cNvSpPr txBox="1"/>
+          <p:nvPr/>
+        </p:nvSpPr>
+        <p:spPr>
+          <a:xfrm>
+            <a:off x="6428232" y="2075688"/>
+            <a:ext cx="2185416" cy="411480"/>
           </a:xfrm>
           <a:prstGeom prst="rect">
             <a:avLst/>
@@ -29967,16 +30342,13 @@
           <a:bodyPr wrap="square" anchor="t"/>
           <a:lstStyle/>
           <a:p>
-            <a:pPr algn="ctr" eaLnBrk="0">
-              <a:lnSpc>
-                <a:spcPct val="110000"/>
-              </a:lnSpc>
-              <a:spcAft>
-                <a:spcPts val="400"/>
-              </a:spcAft>
-            </a:pPr>
-            <a:r>
-              <a:rPr sz="1800" b="1">
+            <a:pPr algn="l" eaLnBrk="0">
+              <a:lnSpc>
+                <a:spcPct val="110000"/>
+              </a:lnSpc>
+            </a:pPr>
+            <a:r>
+              <a:rPr sz="2100" b="1">
                 <a:solidFill>
                   <a:srgbClr val="13294B"/>
                 </a:solidFill>
@@ -29984,111 +30356,130 @@
                 <a:ea typeface="맑은 고딕"/>
                 <a:cs typeface="맑은 고딕"/>
               </a:rPr>
-              <a:t>연결</a:t>
-            </a:r>
-          </a:p>
-          <a:p>
-            <a:pPr algn="ctr" eaLnBrk="0">
-              <a:lnSpc>
-                <a:spcPct val="110000"/>
-              </a:lnSpc>
-              <a:spcAft>
-                <a:spcPts val="400"/>
-              </a:spcAft>
+              <a:t>등록 · 배포</a:t>
+            </a:r>
+          </a:p>
+        </p:txBody>
+      </p:sp>
+      <p:sp>
+        <p:nvSpPr>
+          <p:cNvPr id="18" name="TextBox 17"/>
+          <p:cNvSpPr txBox="1"/>
+          <p:nvPr/>
+        </p:nvSpPr>
+        <p:spPr>
+          <a:xfrm>
+            <a:off x="6428232" y="2743200"/>
+            <a:ext cx="2185416" cy="1234440"/>
+          </a:xfrm>
+          <a:prstGeom prst="rect">
+            <a:avLst/>
+          </a:prstGeom>
+          <a:noFill/>
+        </p:spPr>
+        <p:txBody>
+          <a:bodyPr wrap="square" anchor="t"/>
+          <a:lstStyle/>
+          <a:p>
+            <a:pPr algn="l" eaLnBrk="0">
+              <a:lnSpc>
+                <a:spcPct val="110000"/>
+              </a:lnSpc>
             </a:pPr>
             <a:r>
               <a:rPr sz="1500" b="0">
                 <a:solidFill>
-                  <a:srgbClr val="1F2A3A"/>
-                </a:solidFill>
-                <a:latin typeface="맑은 고딕"/>
-                <a:ea typeface="맑은 고딕"/>
-                <a:cs typeface="맑은 고딕"/>
-              </a:rPr>
-              <a:t>그린 그림에 PM_DUE,</a:t>
-            </a:r>
-          </a:p>
-          <a:p>
-            <a:pPr algn="ctr" eaLnBrk="0">
-              <a:lnSpc>
-                <a:spcPct val="110000"/>
-              </a:lnSpc>
-              <a:spcAft>
-                <a:spcPts val="400"/>
-              </a:spcAft>
+                  <a:srgbClr val="13294B"/>
+                </a:solidFill>
+                <a:latin typeface="맑은 고딕"/>
+                <a:ea typeface="맑은 고딕"/>
+                <a:cs typeface="맑은 고딕"/>
+              </a:rPr>
+              <a:t>판본으로 등록하고</a:t>
+            </a:r>
+          </a:p>
+          <a:p>
+            <a:pPr algn="l" eaLnBrk="0">
+              <a:lnSpc>
+                <a:spcPct val="110000"/>
+              </a:lnSpc>
             </a:pPr>
             <a:r>
               <a:rPr sz="1500" b="0">
                 <a:solidFill>
-                  <a:srgbClr val="1F2A3A"/>
-                </a:solidFill>
-                <a:latin typeface="맑은 고딕"/>
-                <a:ea typeface="맑은 고딕"/>
-                <a:cs typeface="맑은 고딕"/>
-              </a:rPr>
-              <a:t>정비 계획 에이전트,</a:t>
-            </a:r>
-          </a:p>
-          <a:p>
-            <a:pPr algn="ctr" eaLnBrk="0">
-              <a:lnSpc>
-                <a:spcPct val="110000"/>
-              </a:lnSpc>
-              <a:spcAft>
-                <a:spcPts val="400"/>
-              </a:spcAft>
+                  <a:srgbClr val="13294B"/>
+                </a:solidFill>
+                <a:latin typeface="맑은 고딕"/>
+                <a:ea typeface="맑은 고딕"/>
+                <a:cs typeface="맑은 고딕"/>
+              </a:rPr>
+              <a:t>배포해 경보를</a:t>
+            </a:r>
+          </a:p>
+          <a:p>
+            <a:pPr algn="l" eaLnBrk="0">
+              <a:lnSpc>
+                <a:spcPct val="110000"/>
+              </a:lnSpc>
             </a:pPr>
             <a:r>
               <a:rPr sz="1500" b="0">
                 <a:solidFill>
-                  <a:srgbClr val="1F2A3A"/>
-                </a:solidFill>
-                <a:latin typeface="맑은 고딕"/>
-                <a:ea typeface="맑은 고딕"/>
-                <a:cs typeface="맑은 고딕"/>
-              </a:rPr>
-              <a:t>설비보전팀장, 기한 10분,</a:t>
-            </a:r>
-          </a:p>
-          <a:p>
-            <a:pPr algn="ctr" eaLnBrk="0">
-              <a:lnSpc>
-                <a:spcPct val="110000"/>
-              </a:lnSpc>
-              <a:spcAft>
-                <a:spcPts val="400"/>
-              </a:spcAft>
-            </a:pPr>
-            <a:r>
-              <a:rPr sz="1500" b="0">
-                <a:solidFill>
-                  <a:srgbClr val="1F2A3A"/>
-                </a:solidFill>
-                <a:latin typeface="맑은 고딕"/>
-                <a:ea typeface="맑은 고딕"/>
-                <a:cs typeface="맑은 고딕"/>
-              </a:rPr>
-              <a:t>CMMS 오더와 공지</a:t>
-            </a:r>
-          </a:p>
-        </p:txBody>
-      </p:sp>
-      <p:sp>
-        <p:nvSpPr>
-          <p:cNvPr id="10" name="Right Arrow 9"/>
+                  <a:srgbClr val="13294B"/>
+                </a:solidFill>
+                <a:latin typeface="맑은 고딕"/>
+                <a:ea typeface="맑은 고딕"/>
+                <a:cs typeface="맑은 고딕"/>
+              </a:rPr>
+              <a:t>받는 흐름으로 만든다</a:t>
+            </a:r>
+          </a:p>
+        </p:txBody>
+      </p:sp>
+      <p:sp>
+        <p:nvSpPr>
+          <p:cNvPr id="19" name="TextBox 18"/>
+          <p:cNvSpPr txBox="1"/>
+          <p:nvPr/>
+        </p:nvSpPr>
+        <p:spPr>
+          <a:xfrm>
+            <a:off x="6428232" y="4133087"/>
+            <a:ext cx="2185416" cy="329184"/>
+          </a:xfrm>
+          <a:prstGeom prst="rect">
+            <a:avLst/>
+          </a:prstGeom>
+          <a:noFill/>
+        </p:spPr>
+        <p:txBody>
+          <a:bodyPr wrap="square" anchor="t"/>
+          <a:lstStyle/>
+          <a:p>
+            <a:pPr algn="l" eaLnBrk="0">
+              <a:lnSpc>
+                <a:spcPct val="110000"/>
+              </a:lnSpc>
+            </a:pPr>
+          </a:p>
+        </p:txBody>
+      </p:sp>
+      <p:sp>
+        <p:nvSpPr>
+          <p:cNvPr id="20" name="Right Arrow 19"/>
           <p:cNvSpPr/>
           <p:nvPr/>
         </p:nvSpPr>
         <p:spPr>
           <a:xfrm>
-            <a:off x="2524292" y="3854196"/>
-            <a:ext cx="256031" cy="274320"/>
+            <a:off x="8842248" y="3154680"/>
+            <a:ext cx="201168" cy="164592"/>
           </a:xfrm>
           <a:prstGeom prst="rightArrow">
             <a:avLst/>
           </a:prstGeom>
           <a:solidFill>
-            <a:srgbClr val="13294B"/>
+            <a:srgbClr val="1A6FC4"/>
           </a:solidFill>
           <a:ln>
             <a:noFill/>
@@ -30104,54 +30495,27 @@
       </p:sp>
       <p:sp>
         <p:nvSpPr>
-          <p:cNvPr id="11" name="Rounded Rectangle 10"/>
+          <p:cNvPr id="21" name="Rounded Rectangle 20"/>
           <p:cNvSpPr/>
           <p:nvPr/>
         </p:nvSpPr>
         <p:spPr>
           <a:xfrm>
-            <a:off x="2844332" y="2101215"/>
-            <a:ext cx="1911644" cy="3780281"/>
+            <a:off x="9098280" y="1874519"/>
+            <a:ext cx="2514600" cy="2788920"/>
           </a:xfrm>
           <a:prstGeom prst="roundRect">
             <a:avLst>
-              <a:gd name="adj" fmla="val 5000"/>
+              <a:gd name="adj" fmla="val 6000"/>
             </a:avLst>
-          </a:prstGeom>
-          <a:solidFill>
-            <a:srgbClr val="F3F6F9"/>
-          </a:solidFill>
-          <a:ln>
-            <a:noFill/>
-          </a:ln>
-        </p:spPr>
-        <p:txBody>
-          <a:bodyPr rtlCol="0" anchor="ctr"/>
-          <a:lstStyle/>
-          <a:p>
-            <a:pPr algn="ctr"/>
-          </a:p>
-        </p:txBody>
-      </p:sp>
-      <p:sp>
-        <p:nvSpPr>
-          <p:cNvPr id="12" name="Oval 11"/>
-          <p:cNvSpPr/>
-          <p:nvPr/>
-        </p:nvSpPr>
-        <p:spPr>
-          <a:xfrm>
-            <a:off x="3434394" y="2284095"/>
-            <a:ext cx="731520" cy="731520"/>
-          </a:xfrm>
-          <a:prstGeom prst="ellipse">
-            <a:avLst/>
           </a:prstGeom>
           <a:solidFill>
             <a:srgbClr val="FFFFFF"/>
           </a:solidFill>
-          <a:ln>
-            <a:noFill/>
+          <a:ln w="15875">
+            <a:solidFill>
+              <a:srgbClr val="D3D9E1"/>
+            </a:solidFill>
           </a:ln>
         </p:spPr>
         <p:txBody>
@@ -30162,40 +30526,16 @@
           </a:p>
         </p:txBody>
       </p:sp>
-      <p:pic>
-        <p:nvPicPr>
-          <p:cNvPr id="13" name="아이콘:list-check" descr="list-check_13294B_1.6.png"/>
-          <p:cNvPicPr>
-            <a:picLocks noChangeAspect="1"/>
-          </p:cNvPicPr>
-          <p:nvPr/>
-        </p:nvPicPr>
-        <p:blipFill>
-          <a:blip r:embed="rId4"/>
-          <a:stretch>
-            <a:fillRect/>
-          </a:stretch>
-        </p:blipFill>
-        <p:spPr>
-          <a:xfrm>
-            <a:off x="3588014" y="2437714"/>
-            <a:ext cx="424281" cy="424281"/>
-          </a:xfrm>
-          <a:prstGeom prst="rect">
-            <a:avLst/>
-          </a:prstGeom>
-        </p:spPr>
-      </p:pic>
-      <p:sp>
-        <p:nvSpPr>
-          <p:cNvPr id="14" name="TextBox 13"/>
-          <p:cNvSpPr txBox="1"/>
-          <p:nvPr/>
-        </p:nvSpPr>
-        <p:spPr>
-          <a:xfrm>
-            <a:off x="2917484" y="3088767"/>
-            <a:ext cx="1765340" cy="2719577"/>
+      <p:sp>
+        <p:nvSpPr>
+          <p:cNvPr id="22" name="TextBox 21"/>
+          <p:cNvSpPr txBox="1"/>
+          <p:nvPr/>
+        </p:nvSpPr>
+        <p:spPr>
+          <a:xfrm>
+            <a:off x="9262872" y="2075688"/>
+            <a:ext cx="2185416" cy="411480"/>
           </a:xfrm>
           <a:prstGeom prst="rect">
             <a:avLst/>
@@ -30206,16 +30546,13 @@
           <a:bodyPr wrap="square" anchor="t"/>
           <a:lstStyle/>
           <a:p>
-            <a:pPr algn="ctr" eaLnBrk="0">
-              <a:lnSpc>
-                <a:spcPct val="110000"/>
-              </a:lnSpc>
-              <a:spcAft>
-                <a:spcPts val="400"/>
-              </a:spcAft>
-            </a:pPr>
-            <a:r>
-              <a:rPr sz="1800" b="1">
+            <a:pPr algn="l" eaLnBrk="0">
+              <a:lnSpc>
+                <a:spcPct val="110000"/>
+              </a:lnSpc>
+            </a:pPr>
+            <a:r>
+              <a:rPr sz="2100" b="1">
                 <a:solidFill>
                   <a:srgbClr val="13294B"/>
                 </a:solidFill>
@@ -30223,561 +30560,136 @@
                 <a:ea typeface="맑은 고딕"/>
                 <a:cs typeface="맑은 고딕"/>
               </a:rPr>
-              <a:t>검사</a:t>
-            </a:r>
-          </a:p>
-          <a:p>
-            <a:pPr algn="ctr" eaLnBrk="0">
-              <a:lnSpc>
-                <a:spcPct val="110000"/>
-              </a:lnSpc>
-              <a:spcAft>
-                <a:spcPts val="400"/>
-              </a:spcAft>
+              <a:t>실행</a:t>
+            </a:r>
+          </a:p>
+        </p:txBody>
+      </p:sp>
+      <p:sp>
+        <p:nvSpPr>
+          <p:cNvPr id="23" name="TextBox 22"/>
+          <p:cNvSpPr txBox="1"/>
+          <p:nvPr/>
+        </p:nvSpPr>
+        <p:spPr>
+          <a:xfrm>
+            <a:off x="9262872" y="2743200"/>
+            <a:ext cx="2185416" cy="1234440"/>
+          </a:xfrm>
+          <a:prstGeom prst="rect">
+            <a:avLst/>
+          </a:prstGeom>
+          <a:noFill/>
+        </p:spPr>
+        <p:txBody>
+          <a:bodyPr wrap="square" anchor="t"/>
+          <a:lstStyle/>
+          <a:p>
+            <a:pPr algn="l" eaLnBrk="0">
+              <a:lnSpc>
+                <a:spcPct val="110000"/>
+              </a:lnSpc>
             </a:pPr>
             <a:r>
               <a:rPr sz="1500" b="0">
                 <a:solidFill>
-                  <a:srgbClr val="1F2A3A"/>
-                </a:solidFill>
-                <a:latin typeface="맑은 고딕"/>
-                <a:ea typeface="맑은 고딕"/>
-                <a:cs typeface="맑은 고딕"/>
-              </a:rPr>
-              <a:t>사전 검사로</a:t>
-            </a:r>
-          </a:p>
-          <a:p>
-            <a:pPr algn="ctr" eaLnBrk="0">
-              <a:lnSpc>
-                <a:spcPct val="110000"/>
-              </a:lnSpc>
-              <a:spcAft>
-                <a:spcPts val="400"/>
-              </a:spcAft>
+                  <a:srgbClr val="13294B"/>
+                </a:solidFill>
+                <a:latin typeface="맑은 고딕"/>
+                <a:ea typeface="맑은 고딕"/>
+                <a:cs typeface="맑은 고딕"/>
+              </a:rPr>
+              <a:t>정기 점검 도래로</a:t>
+            </a:r>
+          </a:p>
+          <a:p>
+            <a:pPr algn="l" eaLnBrk="0">
+              <a:lnSpc>
+                <a:spcPct val="110000"/>
+              </a:lnSpc>
             </a:pPr>
             <a:r>
               <a:rPr sz="1500" b="0">
                 <a:solidFill>
-                  <a:srgbClr val="1F2A3A"/>
-                </a:solidFill>
-                <a:latin typeface="맑은 고딕"/>
-                <a:ea typeface="맑은 고딕"/>
-                <a:cs typeface="맑은 고딕"/>
-              </a:rPr>
-              <a:t>승인 없는 효과 경로와</a:t>
-            </a:r>
-          </a:p>
-          <a:p>
-            <a:pPr algn="ctr" eaLnBrk="0">
-              <a:lnSpc>
-                <a:spcPct val="110000"/>
-              </a:lnSpc>
-              <a:spcAft>
-                <a:spcPts val="400"/>
-              </a:spcAft>
+                  <a:srgbClr val="13294B"/>
+                </a:solidFill>
+                <a:latin typeface="맑은 고딕"/>
+                <a:ea typeface="맑은 고딕"/>
+                <a:cs typeface="맑은 고딕"/>
+              </a:rPr>
+              <a:t>처리 건이 열리고</a:t>
+            </a:r>
+          </a:p>
+          <a:p>
+            <a:pPr algn="l" eaLnBrk="0">
+              <a:lnSpc>
+                <a:spcPct val="110000"/>
+              </a:lnSpc>
             </a:pPr>
             <a:r>
               <a:rPr sz="1500" b="0">
                 <a:solidFill>
-                  <a:srgbClr val="1F2A3A"/>
-                </a:solidFill>
-                <a:latin typeface="맑은 고딕"/>
-                <a:ea typeface="맑은 고딕"/>
-                <a:cs typeface="맑은 고딕"/>
-              </a:rPr>
-              <a:t>빠진 연결을 찾는다</a:t>
-            </a:r>
-          </a:p>
-        </p:txBody>
-      </p:sp>
-      <p:sp>
-        <p:nvSpPr>
-          <p:cNvPr id="15" name="Right Arrow 14"/>
+                  <a:srgbClr val="13294B"/>
+                </a:solidFill>
+                <a:latin typeface="맑은 고딕"/>
+                <a:ea typeface="맑은 고딕"/>
+                <a:cs typeface="맑은 고딕"/>
+              </a:rPr>
+              <a:t>추천안이 승인을 기다린다</a:t>
+            </a:r>
+          </a:p>
+        </p:txBody>
+      </p:sp>
+      <p:sp>
+        <p:nvSpPr>
+          <p:cNvPr id="24" name="TextBox 23"/>
+          <p:cNvSpPr txBox="1"/>
+          <p:nvPr/>
+        </p:nvSpPr>
+        <p:spPr>
+          <a:xfrm>
+            <a:off x="9262872" y="4133087"/>
+            <a:ext cx="2185416" cy="329184"/>
+          </a:xfrm>
+          <a:prstGeom prst="rect">
+            <a:avLst/>
+          </a:prstGeom>
+          <a:noFill/>
+        </p:spPr>
+        <p:txBody>
+          <a:bodyPr wrap="square" anchor="t"/>
+          <a:lstStyle/>
+          <a:p>
+            <a:pPr algn="l" eaLnBrk="0">
+              <a:lnSpc>
+                <a:spcPct val="110000"/>
+              </a:lnSpc>
+            </a:pPr>
+          </a:p>
+        </p:txBody>
+      </p:sp>
+      <p:sp>
+        <p:nvSpPr>
+          <p:cNvPr id="25" name="Rounded Rectangle 24"/>
           <p:cNvSpPr/>
           <p:nvPr/>
         </p:nvSpPr>
         <p:spPr>
           <a:xfrm>
-            <a:off x="4819985" y="3854196"/>
-            <a:ext cx="256031" cy="274320"/>
-          </a:xfrm>
-          <a:prstGeom prst="rightArrow">
-            <a:avLst/>
-          </a:prstGeom>
-          <a:solidFill>
-            <a:srgbClr val="13294B"/>
-          </a:solidFill>
-          <a:ln>
-            <a:noFill/>
-          </a:ln>
-        </p:spPr>
-        <p:txBody>
-          <a:bodyPr rtlCol="0" anchor="ctr"/>
-          <a:lstStyle/>
-          <a:p>
-            <a:pPr algn="ctr"/>
-          </a:p>
-        </p:txBody>
-      </p:sp>
-      <p:sp>
-        <p:nvSpPr>
-          <p:cNvPr id="16" name="Rounded Rectangle 15"/>
-          <p:cNvSpPr/>
-          <p:nvPr/>
-        </p:nvSpPr>
-        <p:spPr>
-          <a:xfrm>
-            <a:off x="5140025" y="2101215"/>
-            <a:ext cx="1911644" cy="3780281"/>
+            <a:off x="594360" y="5166360"/>
+            <a:ext cx="11018520" cy="960120"/>
           </a:xfrm>
           <a:prstGeom prst="roundRect">
             <a:avLst>
-              <a:gd name="adj" fmla="val 5000"/>
-            </a:avLst>
-          </a:prstGeom>
-          <a:solidFill>
-            <a:srgbClr val="F3F6F9"/>
-          </a:solidFill>
-          <a:ln>
-            <a:noFill/>
-          </a:ln>
-        </p:spPr>
-        <p:txBody>
-          <a:bodyPr rtlCol="0" anchor="ctr"/>
-          <a:lstStyle/>
-          <a:p>
-            <a:pPr algn="ctr"/>
-          </a:p>
-        </p:txBody>
-      </p:sp>
-      <p:sp>
-        <p:nvSpPr>
-          <p:cNvPr id="17" name="Oval 16"/>
-          <p:cNvSpPr/>
-          <p:nvPr/>
-        </p:nvSpPr>
-        <p:spPr>
-          <a:xfrm>
-            <a:off x="5730087" y="2284095"/>
-            <a:ext cx="731520" cy="731520"/>
-          </a:xfrm>
-          <a:prstGeom prst="ellipse">
-            <a:avLst/>
-          </a:prstGeom>
-          <a:solidFill>
-            <a:srgbClr val="FFFFFF"/>
-          </a:solidFill>
-          <a:ln>
-            <a:noFill/>
-          </a:ln>
-        </p:spPr>
-        <p:txBody>
-          <a:bodyPr rtlCol="0" anchor="ctr"/>
-          <a:lstStyle/>
-          <a:p>
-            <a:pPr algn="ctr"/>
-          </a:p>
-        </p:txBody>
-      </p:sp>
-      <p:pic>
-        <p:nvPicPr>
-          <p:cNvPr id="18" name="아이콘:rocket" descr="rocket_13294B_1.6.png"/>
-          <p:cNvPicPr>
-            <a:picLocks noChangeAspect="1"/>
-          </p:cNvPicPr>
-          <p:nvPr/>
-        </p:nvPicPr>
-        <p:blipFill>
-          <a:blip r:embed="rId5"/>
-          <a:stretch>
-            <a:fillRect/>
-          </a:stretch>
-        </p:blipFill>
-        <p:spPr>
-          <a:xfrm>
-            <a:off x="5883706" y="2437714"/>
-            <a:ext cx="424281" cy="424281"/>
-          </a:xfrm>
-          <a:prstGeom prst="rect">
-            <a:avLst/>
-          </a:prstGeom>
-        </p:spPr>
-      </p:pic>
-      <p:sp>
-        <p:nvSpPr>
-          <p:cNvPr id="19" name="TextBox 18"/>
-          <p:cNvSpPr txBox="1"/>
-          <p:nvPr/>
-        </p:nvSpPr>
-        <p:spPr>
-          <a:xfrm>
-            <a:off x="5213177" y="3088767"/>
-            <a:ext cx="1765340" cy="2719577"/>
-          </a:xfrm>
-          <a:prstGeom prst="rect">
-            <a:avLst/>
-          </a:prstGeom>
-          <a:noFill/>
-        </p:spPr>
-        <p:txBody>
-          <a:bodyPr wrap="square" anchor="t"/>
-          <a:lstStyle/>
-          <a:p>
-            <a:pPr algn="ctr" eaLnBrk="0">
-              <a:lnSpc>
-                <a:spcPct val="110000"/>
-              </a:lnSpc>
-              <a:spcAft>
-                <a:spcPts val="400"/>
-              </a:spcAft>
-            </a:pPr>
-            <a:r>
-              <a:rPr sz="1800" b="1">
-                <a:solidFill>
-                  <a:srgbClr val="13294B"/>
-                </a:solidFill>
-                <a:latin typeface="맑은 고딕"/>
-                <a:ea typeface="맑은 고딕"/>
-                <a:cs typeface="맑은 고딕"/>
-              </a:rPr>
-              <a:t>등록 · 배포</a:t>
-            </a:r>
-          </a:p>
-          <a:p>
-            <a:pPr algn="ctr" eaLnBrk="0">
-              <a:lnSpc>
-                <a:spcPct val="110000"/>
-              </a:lnSpc>
-              <a:spcAft>
-                <a:spcPts val="400"/>
-              </a:spcAft>
-            </a:pPr>
-            <a:r>
-              <a:rPr sz="1500" b="0">
-                <a:solidFill>
-                  <a:srgbClr val="1F2A3A"/>
-                </a:solidFill>
-                <a:latin typeface="맑은 고딕"/>
-                <a:ea typeface="맑은 고딕"/>
-                <a:cs typeface="맑은 고딕"/>
-              </a:rPr>
-              <a:t>판본으로 등록하고</a:t>
-            </a:r>
-          </a:p>
-          <a:p>
-            <a:pPr algn="ctr" eaLnBrk="0">
-              <a:lnSpc>
-                <a:spcPct val="110000"/>
-              </a:lnSpc>
-              <a:spcAft>
-                <a:spcPts val="400"/>
-              </a:spcAft>
-            </a:pPr>
-            <a:r>
-              <a:rPr sz="1500" b="0">
-                <a:solidFill>
-                  <a:srgbClr val="1F2A3A"/>
-                </a:solidFill>
-                <a:latin typeface="맑은 고딕"/>
-                <a:ea typeface="맑은 고딕"/>
-                <a:cs typeface="맑은 고딕"/>
-              </a:rPr>
-              <a:t>배포해 경보를</a:t>
-            </a:r>
-          </a:p>
-          <a:p>
-            <a:pPr algn="ctr" eaLnBrk="0">
-              <a:lnSpc>
-                <a:spcPct val="110000"/>
-              </a:lnSpc>
-              <a:spcAft>
-                <a:spcPts val="400"/>
-              </a:spcAft>
-            </a:pPr>
-            <a:r>
-              <a:rPr sz="1500" b="0">
-                <a:solidFill>
-                  <a:srgbClr val="1F2A3A"/>
-                </a:solidFill>
-                <a:latin typeface="맑은 고딕"/>
-                <a:ea typeface="맑은 고딕"/>
-                <a:cs typeface="맑은 고딕"/>
-              </a:rPr>
-              <a:t>받는 흐름으로 만든다</a:t>
-            </a:r>
-          </a:p>
-        </p:txBody>
-      </p:sp>
-      <p:sp>
-        <p:nvSpPr>
-          <p:cNvPr id="20" name="Right Arrow 19"/>
-          <p:cNvSpPr/>
-          <p:nvPr/>
-        </p:nvSpPr>
-        <p:spPr>
-          <a:xfrm>
-            <a:off x="7115677" y="3854196"/>
-            <a:ext cx="256031" cy="274320"/>
-          </a:xfrm>
-          <a:prstGeom prst="rightArrow">
-            <a:avLst/>
-          </a:prstGeom>
-          <a:solidFill>
-            <a:srgbClr val="13294B"/>
-          </a:solidFill>
-          <a:ln>
-            <a:noFill/>
-          </a:ln>
-        </p:spPr>
-        <p:txBody>
-          <a:bodyPr rtlCol="0" anchor="ctr"/>
-          <a:lstStyle/>
-          <a:p>
-            <a:pPr algn="ctr"/>
-          </a:p>
-        </p:txBody>
-      </p:sp>
-      <p:sp>
-        <p:nvSpPr>
-          <p:cNvPr id="21" name="Rounded Rectangle 20"/>
-          <p:cNvSpPr/>
-          <p:nvPr/>
-        </p:nvSpPr>
-        <p:spPr>
-          <a:xfrm>
-            <a:off x="7435717" y="2101215"/>
-            <a:ext cx="1911644" cy="3780281"/>
-          </a:xfrm>
-          <a:prstGeom prst="roundRect">
-            <a:avLst>
-              <a:gd name="adj" fmla="val 5000"/>
-            </a:avLst>
-          </a:prstGeom>
-          <a:solidFill>
-            <a:srgbClr val="F3F6F9"/>
-          </a:solidFill>
-          <a:ln>
-            <a:noFill/>
-          </a:ln>
-        </p:spPr>
-        <p:txBody>
-          <a:bodyPr rtlCol="0" anchor="ctr"/>
-          <a:lstStyle/>
-          <a:p>
-            <a:pPr algn="ctr"/>
-          </a:p>
-        </p:txBody>
-      </p:sp>
-      <p:sp>
-        <p:nvSpPr>
-          <p:cNvPr id="22" name="Oval 21"/>
-          <p:cNvSpPr/>
-          <p:nvPr/>
-        </p:nvSpPr>
-        <p:spPr>
-          <a:xfrm>
-            <a:off x="8025780" y="2284095"/>
-            <a:ext cx="731520" cy="731520"/>
-          </a:xfrm>
-          <a:prstGeom prst="ellipse">
-            <a:avLst/>
-          </a:prstGeom>
-          <a:solidFill>
-            <a:srgbClr val="FFFFFF"/>
-          </a:solidFill>
-          <a:ln>
-            <a:noFill/>
-          </a:ln>
-        </p:spPr>
-        <p:txBody>
-          <a:bodyPr rtlCol="0" anchor="ctr"/>
-          <a:lstStyle/>
-          <a:p>
-            <a:pPr algn="ctr"/>
-          </a:p>
-        </p:txBody>
-      </p:sp>
-      <p:pic>
-        <p:nvPicPr>
-          <p:cNvPr id="23" name="아이콘:player-play" descr="player-play_13294B_1.6.png"/>
-          <p:cNvPicPr>
-            <a:picLocks noChangeAspect="1"/>
-          </p:cNvPicPr>
-          <p:nvPr/>
-        </p:nvPicPr>
-        <p:blipFill>
-          <a:blip r:embed="rId6"/>
-          <a:stretch>
-            <a:fillRect/>
-          </a:stretch>
-        </p:blipFill>
-        <p:spPr>
-          <a:xfrm>
-            <a:off x="8179399" y="2437714"/>
-            <a:ext cx="424281" cy="424281"/>
-          </a:xfrm>
-          <a:prstGeom prst="rect">
-            <a:avLst/>
-          </a:prstGeom>
-        </p:spPr>
-      </p:pic>
-      <p:sp>
-        <p:nvSpPr>
-          <p:cNvPr id="24" name="TextBox 23"/>
-          <p:cNvSpPr txBox="1"/>
-          <p:nvPr/>
-        </p:nvSpPr>
-        <p:spPr>
-          <a:xfrm>
-            <a:off x="7508869" y="3088767"/>
-            <a:ext cx="1765340" cy="2719577"/>
-          </a:xfrm>
-          <a:prstGeom prst="rect">
-            <a:avLst/>
-          </a:prstGeom>
-          <a:noFill/>
-        </p:spPr>
-        <p:txBody>
-          <a:bodyPr wrap="square" anchor="t"/>
-          <a:lstStyle/>
-          <a:p>
-            <a:pPr algn="ctr" eaLnBrk="0">
-              <a:lnSpc>
-                <a:spcPct val="110000"/>
-              </a:lnSpc>
-              <a:spcAft>
-                <a:spcPts val="400"/>
-              </a:spcAft>
-            </a:pPr>
-            <a:r>
-              <a:rPr sz="1800" b="1">
-                <a:solidFill>
-                  <a:srgbClr val="13294B"/>
-                </a:solidFill>
-                <a:latin typeface="맑은 고딕"/>
-                <a:ea typeface="맑은 고딕"/>
-                <a:cs typeface="맑은 고딕"/>
-              </a:rPr>
-              <a:t>실행</a:t>
-            </a:r>
-          </a:p>
-          <a:p>
-            <a:pPr algn="ctr" eaLnBrk="0">
-              <a:lnSpc>
-                <a:spcPct val="110000"/>
-              </a:lnSpc>
-              <a:spcAft>
-                <a:spcPts val="400"/>
-              </a:spcAft>
-            </a:pPr>
-            <a:r>
-              <a:rPr sz="1500" b="0">
-                <a:solidFill>
-                  <a:srgbClr val="1F2A3A"/>
-                </a:solidFill>
-                <a:latin typeface="맑은 고딕"/>
-                <a:ea typeface="맑은 고딕"/>
-                <a:cs typeface="맑은 고딕"/>
-              </a:rPr>
-              <a:t>정기 점검 도래로</a:t>
-            </a:r>
-          </a:p>
-          <a:p>
-            <a:pPr algn="ctr" eaLnBrk="0">
-              <a:lnSpc>
-                <a:spcPct val="110000"/>
-              </a:lnSpc>
-              <a:spcAft>
-                <a:spcPts val="400"/>
-              </a:spcAft>
-            </a:pPr>
-            <a:r>
-              <a:rPr sz="1500" b="0">
-                <a:solidFill>
-                  <a:srgbClr val="1F2A3A"/>
-                </a:solidFill>
-                <a:latin typeface="맑은 고딕"/>
-                <a:ea typeface="맑은 고딕"/>
-                <a:cs typeface="맑은 고딕"/>
-              </a:rPr>
-              <a:t>처리 건이 열리고</a:t>
-            </a:r>
-          </a:p>
-          <a:p>
-            <a:pPr algn="ctr" eaLnBrk="0">
-              <a:lnSpc>
-                <a:spcPct val="110000"/>
-              </a:lnSpc>
-              <a:spcAft>
-                <a:spcPts val="400"/>
-              </a:spcAft>
-            </a:pPr>
-            <a:r>
-              <a:rPr sz="1500" b="0">
-                <a:solidFill>
-                  <a:srgbClr val="1F2A3A"/>
-                </a:solidFill>
-                <a:latin typeface="맑은 고딕"/>
-                <a:ea typeface="맑은 고딕"/>
-                <a:cs typeface="맑은 고딕"/>
-              </a:rPr>
-              <a:t>추천안이 승인을 기다린다</a:t>
-            </a:r>
-          </a:p>
-        </p:txBody>
-      </p:sp>
-      <p:sp>
-        <p:nvSpPr>
-          <p:cNvPr id="25" name="Right Arrow 24"/>
-          <p:cNvSpPr/>
-          <p:nvPr/>
-        </p:nvSpPr>
-        <p:spPr>
-          <a:xfrm>
-            <a:off x="9411370" y="3854196"/>
-            <a:ext cx="256031" cy="274320"/>
-          </a:xfrm>
-          <a:prstGeom prst="rightArrow">
-            <a:avLst/>
-          </a:prstGeom>
-          <a:solidFill>
-            <a:srgbClr val="13294B"/>
-          </a:solidFill>
-          <a:ln>
-            <a:noFill/>
-          </a:ln>
-        </p:spPr>
-        <p:txBody>
-          <a:bodyPr rtlCol="0" anchor="ctr"/>
-          <a:lstStyle/>
-          <a:p>
-            <a:pPr algn="ctr"/>
-          </a:p>
-        </p:txBody>
-      </p:sp>
-      <p:sp>
-        <p:nvSpPr>
-          <p:cNvPr id="26" name="Rounded Rectangle 25"/>
-          <p:cNvSpPr/>
-          <p:nvPr/>
-        </p:nvSpPr>
-        <p:spPr>
-          <a:xfrm>
-            <a:off x="9731410" y="2101215"/>
-            <a:ext cx="1911644" cy="3780281"/>
-          </a:xfrm>
-          <a:prstGeom prst="roundRect">
-            <a:avLst>
-              <a:gd name="adj" fmla="val 5000"/>
+              <a:gd name="adj" fmla="val 6000"/>
             </a:avLst>
           </a:prstGeom>
           <a:solidFill>
             <a:srgbClr val="E7F3FD"/>
           </a:solidFill>
-          <a:ln w="25400">
+          <a:ln w="12700">
             <a:solidFill>
-              <a:srgbClr val="5CB8F2"/>
+              <a:srgbClr val="D3D9E1"/>
             </a:solidFill>
           </a:ln>
         </p:spPr>
@@ -30791,67 +30703,14 @@
       </p:sp>
       <p:sp>
         <p:nvSpPr>
-          <p:cNvPr id="27" name="Oval 26"/>
-          <p:cNvSpPr/>
-          <p:nvPr/>
-        </p:nvSpPr>
-        <p:spPr>
-          <a:xfrm>
-            <a:off x="10321472" y="2284095"/>
-            <a:ext cx="731520" cy="731520"/>
-          </a:xfrm>
-          <a:prstGeom prst="ellipse">
-            <a:avLst/>
-          </a:prstGeom>
-          <a:solidFill>
-            <a:srgbClr val="5CB8F2"/>
-          </a:solidFill>
-          <a:ln>
-            <a:noFill/>
-          </a:ln>
-        </p:spPr>
-        <p:txBody>
-          <a:bodyPr rtlCol="0" anchor="ctr"/>
-          <a:lstStyle/>
-          <a:p>
-            <a:pPr algn="ctr"/>
-          </a:p>
-        </p:txBody>
-      </p:sp>
-      <p:pic>
-        <p:nvPicPr>
-          <p:cNvPr id="28" name="아이콘:file-text" descr="file-text_13294B_1.6.png"/>
-          <p:cNvPicPr>
-            <a:picLocks noChangeAspect="1"/>
-          </p:cNvPicPr>
-          <p:nvPr/>
-        </p:nvPicPr>
-        <p:blipFill>
-          <a:blip r:embed="rId7"/>
-          <a:stretch>
-            <a:fillRect/>
-          </a:stretch>
-        </p:blipFill>
-        <p:spPr>
-          <a:xfrm>
-            <a:off x="10475092" y="2437714"/>
-            <a:ext cx="424281" cy="424281"/>
-          </a:xfrm>
-          <a:prstGeom prst="rect">
-            <a:avLst/>
-          </a:prstGeom>
-        </p:spPr>
-      </p:pic>
-      <p:sp>
-        <p:nvSpPr>
-          <p:cNvPr id="29" name="TextBox 28"/>
-          <p:cNvSpPr txBox="1"/>
-          <p:nvPr/>
-        </p:nvSpPr>
-        <p:spPr>
-          <a:xfrm>
-            <a:off x="9804562" y="3088767"/>
-            <a:ext cx="1765340" cy="2719577"/>
+          <p:cNvPr id="26" name="TextBox 25"/>
+          <p:cNvSpPr txBox="1"/>
+          <p:nvPr/>
+        </p:nvSpPr>
+        <p:spPr>
+          <a:xfrm>
+            <a:off x="822960" y="5349240"/>
+            <a:ext cx="2011680" cy="365760"/>
           </a:xfrm>
           <a:prstGeom prst="rect">
             <a:avLst/>
@@ -30862,16 +30721,13 @@
           <a:bodyPr wrap="square" anchor="t"/>
           <a:lstStyle/>
           <a:p>
-            <a:pPr algn="ctr" eaLnBrk="0">
-              <a:lnSpc>
-                <a:spcPct val="110000"/>
-              </a:lnSpc>
-              <a:spcAft>
-                <a:spcPts val="400"/>
-              </a:spcAft>
-            </a:pPr>
-            <a:r>
-              <a:rPr sz="1800" b="1">
+            <a:pPr algn="l" eaLnBrk="0">
+              <a:lnSpc>
+                <a:spcPct val="110000"/>
+              </a:lnSpc>
+            </a:pPr>
+            <a:r>
+              <a:rPr sz="2000" b="1">
                 <a:solidFill>
                   <a:srgbClr val="13294B"/>
                 </a:solidFill>
@@ -30882,68 +30738,72 @@
               <a:t>성공 기준</a:t>
             </a:r>
           </a:p>
-          <a:p>
-            <a:pPr algn="ctr" eaLnBrk="0">
-              <a:lnSpc>
-                <a:spcPct val="110000"/>
-              </a:lnSpc>
-              <a:spcAft>
-                <a:spcPts val="400"/>
-              </a:spcAft>
-            </a:pPr>
-            <a:r>
-              <a:rPr sz="1500" b="0">
-                <a:solidFill>
-                  <a:srgbClr val="1F2A3A"/>
-                </a:solidFill>
-                <a:latin typeface="맑은 고딕"/>
-                <a:ea typeface="맑은 고딕"/>
-                <a:cs typeface="맑은 고딕"/>
-              </a:rPr>
-              <a:t>정비 오더, 생산팀 공지,</a:t>
-            </a:r>
-          </a:p>
-          <a:p>
-            <a:pPr algn="ctr" eaLnBrk="0">
-              <a:lnSpc>
-                <a:spcPct val="110000"/>
-              </a:lnSpc>
-              <a:spcAft>
-                <a:spcPts val="400"/>
-              </a:spcAft>
-            </a:pPr>
-            <a:r>
-              <a:rPr sz="1500" b="0">
-                <a:solidFill>
-                  <a:srgbClr val="1F2A3A"/>
-                </a:solidFill>
-                <a:latin typeface="맑은 고딕"/>
-                <a:ea typeface="맑은 고딕"/>
-                <a:cs typeface="맑은 고딕"/>
-              </a:rPr>
-              <a:t>결과 보고와 종료가</a:t>
-            </a:r>
-          </a:p>
-          <a:p>
-            <a:pPr algn="ctr" eaLnBrk="0">
-              <a:lnSpc>
-                <a:spcPct val="110000"/>
-              </a:lnSpc>
-              <a:spcAft>
-                <a:spcPts val="400"/>
-              </a:spcAft>
-            </a:pPr>
-            <a:r>
-              <a:rPr sz="1500" b="0">
-                <a:solidFill>
-                  <a:srgbClr val="1F2A3A"/>
-                </a:solidFill>
-                <a:latin typeface="맑은 고딕"/>
-                <a:ea typeface="맑은 고딕"/>
-                <a:cs typeface="맑은 고딕"/>
-              </a:rPr>
-              <a:t>처리 건에 남는다</a:t>
-            </a:r>
+        </p:txBody>
+      </p:sp>
+      <p:sp>
+        <p:nvSpPr>
+          <p:cNvPr id="27" name="TextBox 26"/>
+          <p:cNvSpPr txBox="1"/>
+          <p:nvPr/>
+        </p:nvSpPr>
+        <p:spPr>
+          <a:xfrm>
+            <a:off x="2880360" y="5321808"/>
+            <a:ext cx="8412480" cy="594360"/>
+          </a:xfrm>
+          <a:prstGeom prst="rect">
+            <a:avLst/>
+          </a:prstGeom>
+          <a:noFill/>
+        </p:spPr>
+        <p:txBody>
+          <a:bodyPr wrap="square" anchor="t"/>
+          <a:lstStyle/>
+          <a:p>
+            <a:pPr algn="l" eaLnBrk="0">
+              <a:lnSpc>
+                <a:spcPct val="110000"/>
+              </a:lnSpc>
+            </a:pPr>
+            <a:r>
+              <a:rPr sz="1700" b="0">
+                <a:solidFill>
+                  <a:srgbClr val="13294B"/>
+                </a:solidFill>
+                <a:latin typeface="맑은 고딕"/>
+                <a:ea typeface="맑은 고딕"/>
+                <a:cs typeface="맑은 고딕"/>
+              </a:rPr>
+              <a:t>정비 오더, 생산팀 공지, · 결과 보고와 종료가 · 처리 건에 남는다</a:t>
+            </a:r>
+          </a:p>
+        </p:txBody>
+      </p:sp>
+      <p:sp>
+        <p:nvSpPr>
+          <p:cNvPr id="28" name="TextBox 27"/>
+          <p:cNvSpPr txBox="1"/>
+          <p:nvPr/>
+        </p:nvSpPr>
+        <p:spPr>
+          <a:xfrm>
+            <a:off x="9326880" y="5404104"/>
+            <a:ext cx="2011680" cy="365760"/>
+          </a:xfrm>
+          <a:prstGeom prst="rect">
+            <a:avLst/>
+          </a:prstGeom>
+          <a:noFill/>
+        </p:spPr>
+        <p:txBody>
+          <a:bodyPr wrap="square" anchor="t"/>
+          <a:lstStyle/>
+          <a:p>
+            <a:pPr algn="l" eaLnBrk="0">
+              <a:lnSpc>
+                <a:spcPct val="110000"/>
+              </a:lnSpc>
+            </a:pPr>
           </a:p>
         </p:txBody>
       </p:sp>
@@ -31210,7 +31070,7 @@
                 <a:ea typeface="맑은 고딕"/>
                 <a:cs typeface="맑은 고딕"/>
               </a:rPr>
-              <a:t>재고 보충 프로세스: 그리는 요소와 완성되는 파일</a:t>
+              <a:t>재고 보충: 그리는 요소와 완성 파일</a:t>
             </a:r>
           </a:p>
         </p:txBody>
@@ -32326,7 +32186,7 @@
                 <a:ea typeface="맑은 고딕"/>
                 <a:cs typeface="맑은 고딕"/>
               </a:rPr>
-              <a:t>재고 보충 프로세스: 연결하고 배포해 실행한 기록</a:t>
+              <a:t>재고 보충: 연결·배포와 실행 기록</a:t>
             </a:r>
           </a:p>
         </p:txBody>
@@ -32446,16 +32306,207 @@
         </p:nvSpPr>
         <p:spPr>
           <a:xfrm>
-            <a:off x="548640" y="2329751"/>
-            <a:ext cx="1911644" cy="3323208"/>
+            <a:off x="594360" y="1874519"/>
+            <a:ext cx="2514600" cy="2788920"/>
           </a:xfrm>
           <a:prstGeom prst="roundRect">
             <a:avLst>
-              <a:gd name="adj" fmla="val 5000"/>
+              <a:gd name="adj" fmla="val 6000"/>
             </a:avLst>
           </a:prstGeom>
           <a:solidFill>
-            <a:srgbClr val="F3F6F9"/>
+            <a:srgbClr val="FFFFFF"/>
+          </a:solidFill>
+          <a:ln w="15875">
+            <a:solidFill>
+              <a:srgbClr val="D3D9E1"/>
+            </a:solidFill>
+          </a:ln>
+        </p:spPr>
+        <p:txBody>
+          <a:bodyPr rtlCol="0" anchor="ctr"/>
+          <a:lstStyle/>
+          <a:p>
+            <a:pPr algn="ctr"/>
+          </a:p>
+        </p:txBody>
+      </p:sp>
+      <p:sp>
+        <p:nvSpPr>
+          <p:cNvPr id="7" name="TextBox 6"/>
+          <p:cNvSpPr txBox="1"/>
+          <p:nvPr/>
+        </p:nvSpPr>
+        <p:spPr>
+          <a:xfrm>
+            <a:off x="758952" y="2075688"/>
+            <a:ext cx="2185416" cy="411480"/>
+          </a:xfrm>
+          <a:prstGeom prst="rect">
+            <a:avLst/>
+          </a:prstGeom>
+          <a:noFill/>
+        </p:spPr>
+        <p:txBody>
+          <a:bodyPr wrap="square" anchor="t"/>
+          <a:lstStyle/>
+          <a:p>
+            <a:pPr algn="l" eaLnBrk="0">
+              <a:lnSpc>
+                <a:spcPct val="110000"/>
+              </a:lnSpc>
+            </a:pPr>
+            <a:r>
+              <a:rPr sz="2100" b="1">
+                <a:solidFill>
+                  <a:srgbClr val="13294B"/>
+                </a:solidFill>
+                <a:latin typeface="맑은 고딕"/>
+                <a:ea typeface="맑은 고딕"/>
+                <a:cs typeface="맑은 고딕"/>
+              </a:rPr>
+              <a:t>연결</a:t>
+            </a:r>
+          </a:p>
+        </p:txBody>
+      </p:sp>
+      <p:sp>
+        <p:nvSpPr>
+          <p:cNvPr id="8" name="TextBox 7"/>
+          <p:cNvSpPr txBox="1"/>
+          <p:nvPr/>
+        </p:nvSpPr>
+        <p:spPr>
+          <a:xfrm>
+            <a:off x="758952" y="2743200"/>
+            <a:ext cx="2185416" cy="1234440"/>
+          </a:xfrm>
+          <a:prstGeom prst="rect">
+            <a:avLst/>
+          </a:prstGeom>
+          <a:noFill/>
+        </p:spPr>
+        <p:txBody>
+          <a:bodyPr wrap="square" anchor="t"/>
+          <a:lstStyle/>
+          <a:p>
+            <a:pPr algn="l" eaLnBrk="0">
+              <a:lnSpc>
+                <a:spcPct val="110000"/>
+              </a:lnSpc>
+            </a:pPr>
+            <a:r>
+              <a:rPr sz="1500" b="0">
+                <a:solidFill>
+                  <a:srgbClr val="13294B"/>
+                </a:solidFill>
+                <a:latin typeface="맑은 고딕"/>
+                <a:ea typeface="맑은 고딕"/>
+                <a:cs typeface="맑은 고딕"/>
+              </a:rPr>
+              <a:t>그린 그림에</a:t>
+            </a:r>
+          </a:p>
+          <a:p>
+            <a:pPr algn="l" eaLnBrk="0">
+              <a:lnSpc>
+                <a:spcPct val="110000"/>
+              </a:lnSpc>
+            </a:pPr>
+            <a:r>
+              <a:rPr sz="1500" b="0">
+                <a:solidFill>
+                  <a:srgbClr val="13294B"/>
+                </a:solidFill>
+                <a:latin typeface="맑은 고딕"/>
+                <a:ea typeface="맑은 고딕"/>
+                <a:cs typeface="맑은 고딕"/>
+              </a:rPr>
+              <a:t>SPARE_BELOW_MIN,</a:t>
+            </a:r>
+          </a:p>
+          <a:p>
+            <a:pPr algn="l" eaLnBrk="0">
+              <a:lnSpc>
+                <a:spcPct val="110000"/>
+              </a:lnSpc>
+            </a:pPr>
+            <a:r>
+              <a:rPr sz="1500" b="0">
+                <a:solidFill>
+                  <a:srgbClr val="13294B"/>
+                </a:solidFill>
+                <a:latin typeface="맑은 고딕"/>
+                <a:ea typeface="맑은 고딕"/>
+                <a:cs typeface="맑은 고딕"/>
+              </a:rPr>
+              <a:t>구매 에이전트,</a:t>
+            </a:r>
+          </a:p>
+          <a:p>
+            <a:pPr algn="l" eaLnBrk="0">
+              <a:lnSpc>
+                <a:spcPct val="110000"/>
+              </a:lnSpc>
+            </a:pPr>
+            <a:r>
+              <a:rPr sz="1500" b="0">
+                <a:solidFill>
+                  <a:srgbClr val="13294B"/>
+                </a:solidFill>
+                <a:latin typeface="맑은 고딕"/>
+                <a:ea typeface="맑은 고딕"/>
+                <a:cs typeface="맑은 고딕"/>
+              </a:rPr>
+              <a:t>구매 담당 역할</a:t>
+            </a:r>
+          </a:p>
+        </p:txBody>
+      </p:sp>
+      <p:sp>
+        <p:nvSpPr>
+          <p:cNvPr id="9" name="TextBox 8"/>
+          <p:cNvSpPr txBox="1"/>
+          <p:nvPr/>
+        </p:nvSpPr>
+        <p:spPr>
+          <a:xfrm>
+            <a:off x="758952" y="4133087"/>
+            <a:ext cx="2185416" cy="329184"/>
+          </a:xfrm>
+          <a:prstGeom prst="rect">
+            <a:avLst/>
+          </a:prstGeom>
+          <a:noFill/>
+        </p:spPr>
+        <p:txBody>
+          <a:bodyPr wrap="square" anchor="t"/>
+          <a:lstStyle/>
+          <a:p>
+            <a:pPr algn="l" eaLnBrk="0">
+              <a:lnSpc>
+                <a:spcPct val="110000"/>
+              </a:lnSpc>
+            </a:pPr>
+          </a:p>
+        </p:txBody>
+      </p:sp>
+      <p:sp>
+        <p:nvSpPr>
+          <p:cNvPr id="10" name="Right Arrow 9"/>
+          <p:cNvSpPr/>
+          <p:nvPr/>
+        </p:nvSpPr>
+        <p:spPr>
+          <a:xfrm>
+            <a:off x="3172968" y="3154680"/>
+            <a:ext cx="201168" cy="164592"/>
+          </a:xfrm>
+          <a:prstGeom prst="rightArrow">
+            <a:avLst/>
+          </a:prstGeom>
+          <a:solidFill>
+            <a:srgbClr val="1A6FC4"/>
           </a:solidFill>
           <a:ln>
             <a:noFill/>
@@ -32471,20 +32522,177 @@
       </p:sp>
       <p:sp>
         <p:nvSpPr>
-          <p:cNvPr id="7" name="Oval 6"/>
+          <p:cNvPr id="11" name="Rounded Rectangle 10"/>
           <p:cNvSpPr/>
           <p:nvPr/>
         </p:nvSpPr>
         <p:spPr>
           <a:xfrm>
-            <a:off x="1138702" y="2512631"/>
-            <a:ext cx="731520" cy="731520"/>
-          </a:xfrm>
-          <a:prstGeom prst="ellipse">
-            <a:avLst/>
+            <a:off x="3429000" y="1874519"/>
+            <a:ext cx="2514600" cy="2788920"/>
+          </a:xfrm>
+          <a:prstGeom prst="roundRect">
+            <a:avLst>
+              <a:gd name="adj" fmla="val 6000"/>
+            </a:avLst>
           </a:prstGeom>
           <a:solidFill>
             <a:srgbClr val="FFFFFF"/>
+          </a:solidFill>
+          <a:ln w="15875">
+            <a:solidFill>
+              <a:srgbClr val="D3D9E1"/>
+            </a:solidFill>
+          </a:ln>
+        </p:spPr>
+        <p:txBody>
+          <a:bodyPr rtlCol="0" anchor="ctr"/>
+          <a:lstStyle/>
+          <a:p>
+            <a:pPr algn="ctr"/>
+          </a:p>
+        </p:txBody>
+      </p:sp>
+      <p:sp>
+        <p:nvSpPr>
+          <p:cNvPr id="12" name="TextBox 11"/>
+          <p:cNvSpPr txBox="1"/>
+          <p:nvPr/>
+        </p:nvSpPr>
+        <p:spPr>
+          <a:xfrm>
+            <a:off x="3593592" y="2075688"/>
+            <a:ext cx="2185416" cy="411480"/>
+          </a:xfrm>
+          <a:prstGeom prst="rect">
+            <a:avLst/>
+          </a:prstGeom>
+          <a:noFill/>
+        </p:spPr>
+        <p:txBody>
+          <a:bodyPr wrap="square" anchor="t"/>
+          <a:lstStyle/>
+          <a:p>
+            <a:pPr algn="l" eaLnBrk="0">
+              <a:lnSpc>
+                <a:spcPct val="110000"/>
+              </a:lnSpc>
+            </a:pPr>
+            <a:r>
+              <a:rPr sz="2100" b="1">
+                <a:solidFill>
+                  <a:srgbClr val="13294B"/>
+                </a:solidFill>
+                <a:latin typeface="맑은 고딕"/>
+                <a:ea typeface="맑은 고딕"/>
+                <a:cs typeface="맑은 고딕"/>
+              </a:rPr>
+              <a:t>검사와 배포</a:t>
+            </a:r>
+          </a:p>
+        </p:txBody>
+      </p:sp>
+      <p:sp>
+        <p:nvSpPr>
+          <p:cNvPr id="13" name="TextBox 12"/>
+          <p:cNvSpPr txBox="1"/>
+          <p:nvPr/>
+        </p:nvSpPr>
+        <p:spPr>
+          <a:xfrm>
+            <a:off x="3593592" y="2743200"/>
+            <a:ext cx="2185416" cy="1234440"/>
+          </a:xfrm>
+          <a:prstGeom prst="rect">
+            <a:avLst/>
+          </a:prstGeom>
+          <a:noFill/>
+        </p:spPr>
+        <p:txBody>
+          <a:bodyPr wrap="square" anchor="t"/>
+          <a:lstStyle/>
+          <a:p>
+            <a:pPr algn="l" eaLnBrk="0">
+              <a:lnSpc>
+                <a:spcPct val="110000"/>
+              </a:lnSpc>
+            </a:pPr>
+            <a:r>
+              <a:rPr sz="1500" b="0">
+                <a:solidFill>
+                  <a:srgbClr val="13294B"/>
+                </a:solidFill>
+                <a:latin typeface="맑은 고딕"/>
+                <a:ea typeface="맑은 고딕"/>
+                <a:cs typeface="맑은 고딕"/>
+              </a:rPr>
+              <a:t>사전 검사를 거쳐</a:t>
+            </a:r>
+          </a:p>
+          <a:p>
+            <a:pPr algn="l" eaLnBrk="0">
+              <a:lnSpc>
+                <a:spcPct val="110000"/>
+              </a:lnSpc>
+            </a:pPr>
+            <a:r>
+              <a:rPr sz="1500" b="0">
+                <a:solidFill>
+                  <a:srgbClr val="13294B"/>
+                </a:solidFill>
+                <a:latin typeface="맑은 고딕"/>
+                <a:ea typeface="맑은 고딕"/>
+                <a:cs typeface="맑은 고딕"/>
+              </a:rPr>
+              <a:t>판본 등록 후 배포한다</a:t>
+            </a:r>
+          </a:p>
+        </p:txBody>
+      </p:sp>
+      <p:sp>
+        <p:nvSpPr>
+          <p:cNvPr id="14" name="TextBox 13"/>
+          <p:cNvSpPr txBox="1"/>
+          <p:nvPr/>
+        </p:nvSpPr>
+        <p:spPr>
+          <a:xfrm>
+            <a:off x="3593592" y="4133087"/>
+            <a:ext cx="2185416" cy="329184"/>
+          </a:xfrm>
+          <a:prstGeom prst="rect">
+            <a:avLst/>
+          </a:prstGeom>
+          <a:noFill/>
+        </p:spPr>
+        <p:txBody>
+          <a:bodyPr wrap="square" anchor="t"/>
+          <a:lstStyle/>
+          <a:p>
+            <a:pPr algn="l" eaLnBrk="0">
+              <a:lnSpc>
+                <a:spcPct val="110000"/>
+              </a:lnSpc>
+            </a:pPr>
+          </a:p>
+        </p:txBody>
+      </p:sp>
+      <p:sp>
+        <p:nvSpPr>
+          <p:cNvPr id="15" name="Right Arrow 14"/>
+          <p:cNvSpPr/>
+          <p:nvPr/>
+        </p:nvSpPr>
+        <p:spPr>
+          <a:xfrm>
+            <a:off x="6007608" y="3154680"/>
+            <a:ext cx="201168" cy="164592"/>
+          </a:xfrm>
+          <a:prstGeom prst="rightArrow">
+            <a:avLst/>
+          </a:prstGeom>
+          <a:solidFill>
+            <a:srgbClr val="1A6FC4"/>
           </a:solidFill>
           <a:ln>
             <a:noFill/>
@@ -32498,40 +32706,49 @@
           </a:p>
         </p:txBody>
       </p:sp>
-      <p:pic>
-        <p:nvPicPr>
-          <p:cNvPr id="8" name="아이콘:plug-connected" descr="plug-connected_13294B_1.6.png"/>
-          <p:cNvPicPr>
-            <a:picLocks noChangeAspect="1"/>
-          </p:cNvPicPr>
-          <p:nvPr/>
-        </p:nvPicPr>
-        <p:blipFill>
-          <a:blip r:embed="rId3"/>
-          <a:stretch>
-            <a:fillRect/>
-          </a:stretch>
-        </p:blipFill>
-        <p:spPr>
-          <a:xfrm>
-            <a:off x="1292321" y="2666250"/>
-            <a:ext cx="424281" cy="424281"/>
-          </a:xfrm>
-          <a:prstGeom prst="rect">
-            <a:avLst/>
-          </a:prstGeom>
-        </p:spPr>
-      </p:pic>
-      <p:sp>
-        <p:nvSpPr>
-          <p:cNvPr id="9" name="TextBox 8"/>
-          <p:cNvSpPr txBox="1"/>
-          <p:nvPr/>
-        </p:nvSpPr>
-        <p:spPr>
-          <a:xfrm>
-            <a:off x="621792" y="3317303"/>
-            <a:ext cx="1765340" cy="2262504"/>
+      <p:sp>
+        <p:nvSpPr>
+          <p:cNvPr id="16" name="Rounded Rectangle 15"/>
+          <p:cNvSpPr/>
+          <p:nvPr/>
+        </p:nvSpPr>
+        <p:spPr>
+          <a:xfrm>
+            <a:off x="6263640" y="1874519"/>
+            <a:ext cx="2514600" cy="2788920"/>
+          </a:xfrm>
+          <a:prstGeom prst="roundRect">
+            <a:avLst>
+              <a:gd name="adj" fmla="val 6000"/>
+            </a:avLst>
+          </a:prstGeom>
+          <a:solidFill>
+            <a:srgbClr val="FFFFFF"/>
+          </a:solidFill>
+          <a:ln w="15875">
+            <a:solidFill>
+              <a:srgbClr val="D3D9E1"/>
+            </a:solidFill>
+          </a:ln>
+        </p:spPr>
+        <p:txBody>
+          <a:bodyPr rtlCol="0" anchor="ctr"/>
+          <a:lstStyle/>
+          <a:p>
+            <a:pPr algn="ctr"/>
+          </a:p>
+        </p:txBody>
+      </p:sp>
+      <p:sp>
+        <p:nvSpPr>
+          <p:cNvPr id="17" name="TextBox 16"/>
+          <p:cNvSpPr txBox="1"/>
+          <p:nvPr/>
+        </p:nvSpPr>
+        <p:spPr>
+          <a:xfrm>
+            <a:off x="6428232" y="2075688"/>
+            <a:ext cx="2185416" cy="411480"/>
           </a:xfrm>
           <a:prstGeom prst="rect">
             <a:avLst/>
@@ -32542,16 +32759,13 @@
           <a:bodyPr wrap="square" anchor="t"/>
           <a:lstStyle/>
           <a:p>
-            <a:pPr algn="ctr" eaLnBrk="0">
-              <a:lnSpc>
-                <a:spcPct val="110000"/>
-              </a:lnSpc>
-              <a:spcAft>
-                <a:spcPts val="400"/>
-              </a:spcAft>
-            </a:pPr>
-            <a:r>
-              <a:rPr sz="1550" b="1">
+            <a:pPr algn="l" eaLnBrk="0">
+              <a:lnSpc>
+                <a:spcPct val="110000"/>
+              </a:lnSpc>
+            </a:pPr>
+            <a:r>
+              <a:rPr sz="2100" b="1">
                 <a:solidFill>
                   <a:srgbClr val="13294B"/>
                 </a:solidFill>
@@ -32559,111 +32773,130 @@
                 <a:ea typeface="맑은 고딕"/>
                 <a:cs typeface="맑은 고딕"/>
               </a:rPr>
-              <a:t>연결</a:t>
-            </a:r>
-          </a:p>
-          <a:p>
-            <a:pPr algn="ctr" eaLnBrk="0">
-              <a:lnSpc>
-                <a:spcPct val="110000"/>
-              </a:lnSpc>
-              <a:spcAft>
-                <a:spcPts val="400"/>
-              </a:spcAft>
-            </a:pPr>
-            <a:r>
-              <a:rPr sz="1250" b="0">
-                <a:solidFill>
-                  <a:srgbClr val="1F2A3A"/>
-                </a:solidFill>
-                <a:latin typeface="맑은 고딕"/>
-                <a:ea typeface="맑은 고딕"/>
-                <a:cs typeface="맑은 고딕"/>
-              </a:rPr>
-              <a:t>그린 그림에</a:t>
-            </a:r>
-          </a:p>
-          <a:p>
-            <a:pPr algn="ctr" eaLnBrk="0">
-              <a:lnSpc>
-                <a:spcPct val="110000"/>
-              </a:lnSpc>
-              <a:spcAft>
-                <a:spcPts val="400"/>
-              </a:spcAft>
-            </a:pPr>
-            <a:r>
-              <a:rPr sz="1250" b="0">
-                <a:solidFill>
-                  <a:srgbClr val="1F2A3A"/>
-                </a:solidFill>
-                <a:latin typeface="맑은 고딕"/>
-                <a:ea typeface="맑은 고딕"/>
-                <a:cs typeface="맑은 고딕"/>
-              </a:rPr>
-              <a:t>SPARE_BELOW_MIN,</a:t>
-            </a:r>
-          </a:p>
-          <a:p>
-            <a:pPr algn="ctr" eaLnBrk="0">
-              <a:lnSpc>
-                <a:spcPct val="110000"/>
-              </a:lnSpc>
-              <a:spcAft>
-                <a:spcPts val="400"/>
-              </a:spcAft>
-            </a:pPr>
-            <a:r>
-              <a:rPr sz="1250" b="0">
-                <a:solidFill>
-                  <a:srgbClr val="1F2A3A"/>
-                </a:solidFill>
-                <a:latin typeface="맑은 고딕"/>
-                <a:ea typeface="맑은 고딕"/>
-                <a:cs typeface="맑은 고딕"/>
-              </a:rPr>
-              <a:t>구매 에이전트,</a:t>
-            </a:r>
-          </a:p>
-          <a:p>
-            <a:pPr algn="ctr" eaLnBrk="0">
-              <a:lnSpc>
-                <a:spcPct val="110000"/>
-              </a:lnSpc>
-              <a:spcAft>
-                <a:spcPts val="400"/>
-              </a:spcAft>
-            </a:pPr>
-            <a:r>
-              <a:rPr sz="1250" b="0">
-                <a:solidFill>
-                  <a:srgbClr val="1F2A3A"/>
-                </a:solidFill>
-                <a:latin typeface="맑은 고딕"/>
-                <a:ea typeface="맑은 고딕"/>
-                <a:cs typeface="맑은 고딕"/>
-              </a:rPr>
-              <a:t>구매 담당 역할</a:t>
-            </a:r>
-          </a:p>
-        </p:txBody>
-      </p:sp>
-      <p:sp>
-        <p:nvSpPr>
-          <p:cNvPr id="10" name="Right Arrow 9"/>
+              <a:t>실행</a:t>
+            </a:r>
+          </a:p>
+        </p:txBody>
+      </p:sp>
+      <p:sp>
+        <p:nvSpPr>
+          <p:cNvPr id="18" name="TextBox 17"/>
+          <p:cNvSpPr txBox="1"/>
+          <p:nvPr/>
+        </p:nvSpPr>
+        <p:spPr>
+          <a:xfrm>
+            <a:off x="6428232" y="2743200"/>
+            <a:ext cx="2185416" cy="1234440"/>
+          </a:xfrm>
+          <a:prstGeom prst="rect">
+            <a:avLst/>
+          </a:prstGeom>
+          <a:noFill/>
+        </p:spPr>
+        <p:txBody>
+          <a:bodyPr wrap="square" anchor="t"/>
+          <a:lstStyle/>
+          <a:p>
+            <a:pPr algn="l" eaLnBrk="0">
+              <a:lnSpc>
+                <a:spcPct val="110000"/>
+              </a:lnSpc>
+            </a:pPr>
+            <a:r>
+              <a:rPr sz="1500" b="0">
+                <a:solidFill>
+                  <a:srgbClr val="13294B"/>
+                </a:solidFill>
+                <a:latin typeface="맑은 고딕"/>
+                <a:ea typeface="맑은 고딕"/>
+                <a:cs typeface="맑은 고딕"/>
+              </a:rPr>
+              <a:t>재고 부족으로</a:t>
+            </a:r>
+          </a:p>
+          <a:p>
+            <a:pPr algn="l" eaLnBrk="0">
+              <a:lnSpc>
+                <a:spcPct val="110000"/>
+              </a:lnSpc>
+            </a:pPr>
+            <a:r>
+              <a:rPr sz="1500" b="0">
+                <a:solidFill>
+                  <a:srgbClr val="13294B"/>
+                </a:solidFill>
+                <a:latin typeface="맑은 고딕"/>
+                <a:ea typeface="맑은 고딕"/>
+                <a:cs typeface="맑은 고딕"/>
+              </a:rPr>
+              <a:t>처리 건이 열리고</a:t>
+            </a:r>
+          </a:p>
+          <a:p>
+            <a:pPr algn="l" eaLnBrk="0">
+              <a:lnSpc>
+                <a:spcPct val="110000"/>
+              </a:lnSpc>
+            </a:pPr>
+            <a:r>
+              <a:rPr sz="1500" b="0">
+                <a:solidFill>
+                  <a:srgbClr val="13294B"/>
+                </a:solidFill>
+                <a:latin typeface="맑은 고딕"/>
+                <a:ea typeface="맑은 고딕"/>
+                <a:cs typeface="맑은 고딕"/>
+              </a:rPr>
+              <a:t>발주안이 승인을 기다린다</a:t>
+            </a:r>
+          </a:p>
+        </p:txBody>
+      </p:sp>
+      <p:sp>
+        <p:nvSpPr>
+          <p:cNvPr id="19" name="TextBox 18"/>
+          <p:cNvSpPr txBox="1"/>
+          <p:nvPr/>
+        </p:nvSpPr>
+        <p:spPr>
+          <a:xfrm>
+            <a:off x="6428232" y="4133087"/>
+            <a:ext cx="2185416" cy="329184"/>
+          </a:xfrm>
+          <a:prstGeom prst="rect">
+            <a:avLst/>
+          </a:prstGeom>
+          <a:noFill/>
+        </p:spPr>
+        <p:txBody>
+          <a:bodyPr wrap="square" anchor="t"/>
+          <a:lstStyle/>
+          <a:p>
+            <a:pPr algn="l" eaLnBrk="0">
+              <a:lnSpc>
+                <a:spcPct val="110000"/>
+              </a:lnSpc>
+            </a:pPr>
+          </a:p>
+        </p:txBody>
+      </p:sp>
+      <p:sp>
+        <p:nvSpPr>
+          <p:cNvPr id="20" name="Right Arrow 19"/>
           <p:cNvSpPr/>
           <p:nvPr/>
         </p:nvSpPr>
         <p:spPr>
           <a:xfrm>
-            <a:off x="2524292" y="3854196"/>
-            <a:ext cx="256031" cy="274320"/>
+            <a:off x="8842248" y="3154680"/>
+            <a:ext cx="201168" cy="164592"/>
           </a:xfrm>
           <a:prstGeom prst="rightArrow">
             <a:avLst/>
           </a:prstGeom>
           <a:solidFill>
-            <a:srgbClr val="13294B"/>
+            <a:srgbClr val="1A6FC4"/>
           </a:solidFill>
           <a:ln>
             <a:noFill/>
@@ -32679,54 +32912,27 @@
       </p:sp>
       <p:sp>
         <p:nvSpPr>
-          <p:cNvPr id="11" name="Rounded Rectangle 10"/>
+          <p:cNvPr id="21" name="Rounded Rectangle 20"/>
           <p:cNvSpPr/>
           <p:nvPr/>
         </p:nvSpPr>
         <p:spPr>
           <a:xfrm>
-            <a:off x="2844332" y="2329751"/>
-            <a:ext cx="1911644" cy="3323208"/>
+            <a:off x="9098280" y="1874519"/>
+            <a:ext cx="2514600" cy="2788920"/>
           </a:xfrm>
           <a:prstGeom prst="roundRect">
             <a:avLst>
-              <a:gd name="adj" fmla="val 5000"/>
+              <a:gd name="adj" fmla="val 6000"/>
             </a:avLst>
-          </a:prstGeom>
-          <a:solidFill>
-            <a:srgbClr val="F3F6F9"/>
-          </a:solidFill>
-          <a:ln>
-            <a:noFill/>
-          </a:ln>
-        </p:spPr>
-        <p:txBody>
-          <a:bodyPr rtlCol="0" anchor="ctr"/>
-          <a:lstStyle/>
-          <a:p>
-            <a:pPr algn="ctr"/>
-          </a:p>
-        </p:txBody>
-      </p:sp>
-      <p:sp>
-        <p:nvSpPr>
-          <p:cNvPr id="12" name="Oval 11"/>
-          <p:cNvSpPr/>
-          <p:nvPr/>
-        </p:nvSpPr>
-        <p:spPr>
-          <a:xfrm>
-            <a:off x="3434394" y="2512631"/>
-            <a:ext cx="731520" cy="731520"/>
-          </a:xfrm>
-          <a:prstGeom prst="ellipse">
-            <a:avLst/>
           </a:prstGeom>
           <a:solidFill>
             <a:srgbClr val="FFFFFF"/>
           </a:solidFill>
-          <a:ln>
-            <a:noFill/>
+          <a:ln w="15875">
+            <a:solidFill>
+              <a:srgbClr val="D3D9E1"/>
+            </a:solidFill>
           </a:ln>
         </p:spPr>
         <p:txBody>
@@ -32737,40 +32943,16 @@
           </a:p>
         </p:txBody>
       </p:sp>
-      <p:pic>
-        <p:nvPicPr>
-          <p:cNvPr id="13" name="아이콘:rocket" descr="rocket_13294B_1.6.png"/>
-          <p:cNvPicPr>
-            <a:picLocks noChangeAspect="1"/>
-          </p:cNvPicPr>
-          <p:nvPr/>
-        </p:nvPicPr>
-        <p:blipFill>
-          <a:blip r:embed="rId4"/>
-          <a:stretch>
-            <a:fillRect/>
-          </a:stretch>
-        </p:blipFill>
-        <p:spPr>
-          <a:xfrm>
-            <a:off x="3588014" y="2666250"/>
-            <a:ext cx="424281" cy="424281"/>
-          </a:xfrm>
-          <a:prstGeom prst="rect">
-            <a:avLst/>
-          </a:prstGeom>
-        </p:spPr>
-      </p:pic>
-      <p:sp>
-        <p:nvSpPr>
-          <p:cNvPr id="14" name="TextBox 13"/>
-          <p:cNvSpPr txBox="1"/>
-          <p:nvPr/>
-        </p:nvSpPr>
-        <p:spPr>
-          <a:xfrm>
-            <a:off x="2917484" y="3317303"/>
-            <a:ext cx="1765340" cy="2262504"/>
+      <p:sp>
+        <p:nvSpPr>
+          <p:cNvPr id="22" name="TextBox 21"/>
+          <p:cNvSpPr txBox="1"/>
+          <p:nvPr/>
+        </p:nvSpPr>
+        <p:spPr>
+          <a:xfrm>
+            <a:off x="9262872" y="2075688"/>
+            <a:ext cx="2185416" cy="411480"/>
           </a:xfrm>
           <a:prstGeom prst="rect">
             <a:avLst/>
@@ -32781,16 +32963,13 @@
           <a:bodyPr wrap="square" anchor="t"/>
           <a:lstStyle/>
           <a:p>
-            <a:pPr algn="ctr" eaLnBrk="0">
-              <a:lnSpc>
-                <a:spcPct val="110000"/>
-              </a:lnSpc>
-              <a:spcAft>
-                <a:spcPts val="400"/>
-              </a:spcAft>
-            </a:pPr>
-            <a:r>
-              <a:rPr sz="1550" b="1">
+            <a:pPr algn="l" eaLnBrk="0">
+              <a:lnSpc>
+                <a:spcPct val="110000"/>
+              </a:lnSpc>
+            </a:pPr>
+            <a:r>
+              <a:rPr sz="2100" b="1">
                 <a:solidFill>
                   <a:srgbClr val="13294B"/>
                 </a:solidFill>
@@ -32798,561 +32977,154 @@
                 <a:ea typeface="맑은 고딕"/>
                 <a:cs typeface="맑은 고딕"/>
               </a:rPr>
-              <a:t>검사 · 등록 · 배포</a:t>
-            </a:r>
-          </a:p>
-          <a:p>
-            <a:pPr algn="ctr" eaLnBrk="0">
-              <a:lnSpc>
-                <a:spcPct val="110000"/>
-              </a:lnSpc>
-              <a:spcAft>
-                <a:spcPts val="400"/>
-              </a:spcAft>
-            </a:pPr>
-            <a:r>
-              <a:rPr sz="1250" b="0">
-                <a:solidFill>
-                  <a:srgbClr val="1F2A3A"/>
-                </a:solidFill>
-                <a:latin typeface="맑은 고딕"/>
-                <a:ea typeface="맑은 고딕"/>
-                <a:cs typeface="맑은 고딕"/>
-              </a:rPr>
-              <a:t>사전 검사를 거쳐</a:t>
-            </a:r>
-          </a:p>
-          <a:p>
-            <a:pPr algn="ctr" eaLnBrk="0">
-              <a:lnSpc>
-                <a:spcPct val="110000"/>
-              </a:lnSpc>
-              <a:spcAft>
-                <a:spcPts val="400"/>
-              </a:spcAft>
-            </a:pPr>
-            <a:r>
-              <a:rPr sz="1250" b="0">
-                <a:solidFill>
-                  <a:srgbClr val="1F2A3A"/>
-                </a:solidFill>
-                <a:latin typeface="맑은 고딕"/>
-                <a:ea typeface="맑은 고딕"/>
-                <a:cs typeface="맑은 고딕"/>
-              </a:rPr>
-              <a:t>등록하고 배포한다</a:t>
-            </a:r>
-          </a:p>
-        </p:txBody>
-      </p:sp>
-      <p:sp>
-        <p:nvSpPr>
-          <p:cNvPr id="15" name="Right Arrow 14"/>
+              <a:t>승인 뒤</a:t>
+            </a:r>
+          </a:p>
+        </p:txBody>
+      </p:sp>
+      <p:sp>
+        <p:nvSpPr>
+          <p:cNvPr id="23" name="TextBox 22"/>
+          <p:cNvSpPr txBox="1"/>
+          <p:nvPr/>
+        </p:nvSpPr>
+        <p:spPr>
+          <a:xfrm>
+            <a:off x="9262872" y="2743200"/>
+            <a:ext cx="2185416" cy="1234440"/>
+          </a:xfrm>
+          <a:prstGeom prst="rect">
+            <a:avLst/>
+          </a:prstGeom>
+          <a:noFill/>
+        </p:spPr>
+        <p:txBody>
+          <a:bodyPr wrap="square" anchor="t"/>
+          <a:lstStyle/>
+          <a:p>
+            <a:pPr algn="l" eaLnBrk="0">
+              <a:lnSpc>
+                <a:spcPct val="110000"/>
+              </a:lnSpc>
+            </a:pPr>
+            <a:r>
+              <a:rPr sz="1500" b="0">
+                <a:solidFill>
+                  <a:srgbClr val="13294B"/>
+                </a:solidFill>
+                <a:latin typeface="맑은 고딕"/>
+                <a:ea typeface="맑은 고딕"/>
+                <a:cs typeface="맑은 고딕"/>
+              </a:rPr>
+              <a:t>ERP 발주,</a:t>
+            </a:r>
+          </a:p>
+          <a:p>
+            <a:pPr algn="l" eaLnBrk="0">
+              <a:lnSpc>
+                <a:spcPct val="110000"/>
+              </a:lnSpc>
+            </a:pPr>
+            <a:r>
+              <a:rPr sz="1500" b="0">
+                <a:solidFill>
+                  <a:srgbClr val="13294B"/>
+                </a:solidFill>
+                <a:latin typeface="맑은 고딕"/>
+                <a:ea typeface="맑은 고딕"/>
+                <a:cs typeface="맑은 고딕"/>
+              </a:rPr>
+              <a:t>공급사 통지,</a:t>
+            </a:r>
+          </a:p>
+          <a:p>
+            <a:pPr algn="l" eaLnBrk="0">
+              <a:lnSpc>
+                <a:spcPct val="110000"/>
+              </a:lnSpc>
+            </a:pPr>
+            <a:r>
+              <a:rPr sz="1500" b="0">
+                <a:solidFill>
+                  <a:srgbClr val="13294B"/>
+                </a:solidFill>
+                <a:latin typeface="맑은 고딕"/>
+                <a:ea typeface="맑은 고딕"/>
+                <a:cs typeface="맑은 고딕"/>
+              </a:rPr>
+              <a:t>입고와 재고 반영</a:t>
+            </a:r>
+          </a:p>
+          <a:p>
+            <a:pPr algn="l" eaLnBrk="0">
+              <a:lnSpc>
+                <a:spcPct val="110000"/>
+              </a:lnSpc>
+            </a:pPr>
+            <a:r>
+              <a:rPr sz="1500" b="0">
+                <a:solidFill>
+                  <a:srgbClr val="13294B"/>
+                </a:solidFill>
+                <a:latin typeface="맑은 고딕"/>
+                <a:ea typeface="맑은 고딕"/>
+                <a:cs typeface="맑은 고딕"/>
+              </a:rPr>
+              <a:t>수업에서는 입고를 즉시 모의 처리</a:t>
+            </a:r>
+          </a:p>
+        </p:txBody>
+      </p:sp>
+      <p:sp>
+        <p:nvSpPr>
+          <p:cNvPr id="24" name="TextBox 23"/>
+          <p:cNvSpPr txBox="1"/>
+          <p:nvPr/>
+        </p:nvSpPr>
+        <p:spPr>
+          <a:xfrm>
+            <a:off x="9262872" y="4133087"/>
+            <a:ext cx="2185416" cy="329184"/>
+          </a:xfrm>
+          <a:prstGeom prst="rect">
+            <a:avLst/>
+          </a:prstGeom>
+          <a:noFill/>
+        </p:spPr>
+        <p:txBody>
+          <a:bodyPr wrap="square" anchor="t"/>
+          <a:lstStyle/>
+          <a:p>
+            <a:pPr algn="l" eaLnBrk="0">
+              <a:lnSpc>
+                <a:spcPct val="110000"/>
+              </a:lnSpc>
+            </a:pPr>
+          </a:p>
+        </p:txBody>
+      </p:sp>
+      <p:sp>
+        <p:nvSpPr>
+          <p:cNvPr id="25" name="Rounded Rectangle 24"/>
           <p:cNvSpPr/>
           <p:nvPr/>
         </p:nvSpPr>
         <p:spPr>
           <a:xfrm>
-            <a:off x="4819985" y="3854196"/>
-            <a:ext cx="256031" cy="274320"/>
-          </a:xfrm>
-          <a:prstGeom prst="rightArrow">
-            <a:avLst/>
-          </a:prstGeom>
-          <a:solidFill>
-            <a:srgbClr val="13294B"/>
-          </a:solidFill>
-          <a:ln>
-            <a:noFill/>
-          </a:ln>
-        </p:spPr>
-        <p:txBody>
-          <a:bodyPr rtlCol="0" anchor="ctr"/>
-          <a:lstStyle/>
-          <a:p>
-            <a:pPr algn="ctr"/>
-          </a:p>
-        </p:txBody>
-      </p:sp>
-      <p:sp>
-        <p:nvSpPr>
-          <p:cNvPr id="16" name="Rounded Rectangle 15"/>
-          <p:cNvSpPr/>
-          <p:nvPr/>
-        </p:nvSpPr>
-        <p:spPr>
-          <a:xfrm>
-            <a:off x="5140025" y="2329751"/>
-            <a:ext cx="1911644" cy="3323208"/>
+            <a:off x="594360" y="5166360"/>
+            <a:ext cx="11018520" cy="960120"/>
           </a:xfrm>
           <a:prstGeom prst="roundRect">
             <a:avLst>
-              <a:gd name="adj" fmla="val 5000"/>
-            </a:avLst>
-          </a:prstGeom>
-          <a:solidFill>
-            <a:srgbClr val="F3F6F9"/>
-          </a:solidFill>
-          <a:ln>
-            <a:noFill/>
-          </a:ln>
-        </p:spPr>
-        <p:txBody>
-          <a:bodyPr rtlCol="0" anchor="ctr"/>
-          <a:lstStyle/>
-          <a:p>
-            <a:pPr algn="ctr"/>
-          </a:p>
-        </p:txBody>
-      </p:sp>
-      <p:sp>
-        <p:nvSpPr>
-          <p:cNvPr id="17" name="Oval 16"/>
-          <p:cNvSpPr/>
-          <p:nvPr/>
-        </p:nvSpPr>
-        <p:spPr>
-          <a:xfrm>
-            <a:off x="5730087" y="2512631"/>
-            <a:ext cx="731520" cy="731520"/>
-          </a:xfrm>
-          <a:prstGeom prst="ellipse">
-            <a:avLst/>
-          </a:prstGeom>
-          <a:solidFill>
-            <a:srgbClr val="FFFFFF"/>
-          </a:solidFill>
-          <a:ln>
-            <a:noFill/>
-          </a:ln>
-        </p:spPr>
-        <p:txBody>
-          <a:bodyPr rtlCol="0" anchor="ctr"/>
-          <a:lstStyle/>
-          <a:p>
-            <a:pPr algn="ctr"/>
-          </a:p>
-        </p:txBody>
-      </p:sp>
-      <p:pic>
-        <p:nvPicPr>
-          <p:cNvPr id="18" name="아이콘:player-play" descr="player-play_13294B_1.6.png"/>
-          <p:cNvPicPr>
-            <a:picLocks noChangeAspect="1"/>
-          </p:cNvPicPr>
-          <p:nvPr/>
-        </p:nvPicPr>
-        <p:blipFill>
-          <a:blip r:embed="rId5"/>
-          <a:stretch>
-            <a:fillRect/>
-          </a:stretch>
-        </p:blipFill>
-        <p:spPr>
-          <a:xfrm>
-            <a:off x="5883706" y="2666250"/>
-            <a:ext cx="424281" cy="424281"/>
-          </a:xfrm>
-          <a:prstGeom prst="rect">
-            <a:avLst/>
-          </a:prstGeom>
-        </p:spPr>
-      </p:pic>
-      <p:sp>
-        <p:nvSpPr>
-          <p:cNvPr id="19" name="TextBox 18"/>
-          <p:cNvSpPr txBox="1"/>
-          <p:nvPr/>
-        </p:nvSpPr>
-        <p:spPr>
-          <a:xfrm>
-            <a:off x="5213177" y="3317303"/>
-            <a:ext cx="1765340" cy="2262504"/>
-          </a:xfrm>
-          <a:prstGeom prst="rect">
-            <a:avLst/>
-          </a:prstGeom>
-          <a:noFill/>
-        </p:spPr>
-        <p:txBody>
-          <a:bodyPr wrap="square" anchor="t"/>
-          <a:lstStyle/>
-          <a:p>
-            <a:pPr algn="ctr" eaLnBrk="0">
-              <a:lnSpc>
-                <a:spcPct val="110000"/>
-              </a:lnSpc>
-              <a:spcAft>
-                <a:spcPts val="400"/>
-              </a:spcAft>
-            </a:pPr>
-            <a:r>
-              <a:rPr sz="1550" b="1">
-                <a:solidFill>
-                  <a:srgbClr val="13294B"/>
-                </a:solidFill>
-                <a:latin typeface="맑은 고딕"/>
-                <a:ea typeface="맑은 고딕"/>
-                <a:cs typeface="맑은 고딕"/>
-              </a:rPr>
-              <a:t>실행</a:t>
-            </a:r>
-          </a:p>
-          <a:p>
-            <a:pPr algn="ctr" eaLnBrk="0">
-              <a:lnSpc>
-                <a:spcPct val="110000"/>
-              </a:lnSpc>
-              <a:spcAft>
-                <a:spcPts val="400"/>
-              </a:spcAft>
-            </a:pPr>
-            <a:r>
-              <a:rPr sz="1250" b="0">
-                <a:solidFill>
-                  <a:srgbClr val="1F2A3A"/>
-                </a:solidFill>
-                <a:latin typeface="맑은 고딕"/>
-                <a:ea typeface="맑은 고딕"/>
-                <a:cs typeface="맑은 고딕"/>
-              </a:rPr>
-              <a:t>재고 부족으로</a:t>
-            </a:r>
-          </a:p>
-          <a:p>
-            <a:pPr algn="ctr" eaLnBrk="0">
-              <a:lnSpc>
-                <a:spcPct val="110000"/>
-              </a:lnSpc>
-              <a:spcAft>
-                <a:spcPts val="400"/>
-              </a:spcAft>
-            </a:pPr>
-            <a:r>
-              <a:rPr sz="1250" b="0">
-                <a:solidFill>
-                  <a:srgbClr val="1F2A3A"/>
-                </a:solidFill>
-                <a:latin typeface="맑은 고딕"/>
-                <a:ea typeface="맑은 고딕"/>
-                <a:cs typeface="맑은 고딕"/>
-              </a:rPr>
-              <a:t>처리 건이 열리고</a:t>
-            </a:r>
-          </a:p>
-          <a:p>
-            <a:pPr algn="ctr" eaLnBrk="0">
-              <a:lnSpc>
-                <a:spcPct val="110000"/>
-              </a:lnSpc>
-              <a:spcAft>
-                <a:spcPts val="400"/>
-              </a:spcAft>
-            </a:pPr>
-            <a:r>
-              <a:rPr sz="1250" b="0">
-                <a:solidFill>
-                  <a:srgbClr val="1F2A3A"/>
-                </a:solidFill>
-                <a:latin typeface="맑은 고딕"/>
-                <a:ea typeface="맑은 고딕"/>
-                <a:cs typeface="맑은 고딕"/>
-              </a:rPr>
-              <a:t>발주안이 승인을 기다린다</a:t>
-            </a:r>
-          </a:p>
-        </p:txBody>
-      </p:sp>
-      <p:sp>
-        <p:nvSpPr>
-          <p:cNvPr id="20" name="Right Arrow 19"/>
-          <p:cNvSpPr/>
-          <p:nvPr/>
-        </p:nvSpPr>
-        <p:spPr>
-          <a:xfrm>
-            <a:off x="7115677" y="3854196"/>
-            <a:ext cx="256031" cy="274320"/>
-          </a:xfrm>
-          <a:prstGeom prst="rightArrow">
-            <a:avLst/>
-          </a:prstGeom>
-          <a:solidFill>
-            <a:srgbClr val="13294B"/>
-          </a:solidFill>
-          <a:ln>
-            <a:noFill/>
-          </a:ln>
-        </p:spPr>
-        <p:txBody>
-          <a:bodyPr rtlCol="0" anchor="ctr"/>
-          <a:lstStyle/>
-          <a:p>
-            <a:pPr algn="ctr"/>
-          </a:p>
-        </p:txBody>
-      </p:sp>
-      <p:sp>
-        <p:nvSpPr>
-          <p:cNvPr id="21" name="Rounded Rectangle 20"/>
-          <p:cNvSpPr/>
-          <p:nvPr/>
-        </p:nvSpPr>
-        <p:spPr>
-          <a:xfrm>
-            <a:off x="7435717" y="2329751"/>
-            <a:ext cx="1911644" cy="3323208"/>
-          </a:xfrm>
-          <a:prstGeom prst="roundRect">
-            <a:avLst>
-              <a:gd name="adj" fmla="val 5000"/>
-            </a:avLst>
-          </a:prstGeom>
-          <a:solidFill>
-            <a:srgbClr val="F3F6F9"/>
-          </a:solidFill>
-          <a:ln>
-            <a:noFill/>
-          </a:ln>
-        </p:spPr>
-        <p:txBody>
-          <a:bodyPr rtlCol="0" anchor="ctr"/>
-          <a:lstStyle/>
-          <a:p>
-            <a:pPr algn="ctr"/>
-          </a:p>
-        </p:txBody>
-      </p:sp>
-      <p:sp>
-        <p:nvSpPr>
-          <p:cNvPr id="22" name="Oval 21"/>
-          <p:cNvSpPr/>
-          <p:nvPr/>
-        </p:nvSpPr>
-        <p:spPr>
-          <a:xfrm>
-            <a:off x="8025780" y="2512631"/>
-            <a:ext cx="731520" cy="731520"/>
-          </a:xfrm>
-          <a:prstGeom prst="ellipse">
-            <a:avLst/>
-          </a:prstGeom>
-          <a:solidFill>
-            <a:srgbClr val="FFFFFF"/>
-          </a:solidFill>
-          <a:ln>
-            <a:noFill/>
-          </a:ln>
-        </p:spPr>
-        <p:txBody>
-          <a:bodyPr rtlCol="0" anchor="ctr"/>
-          <a:lstStyle/>
-          <a:p>
-            <a:pPr algn="ctr"/>
-          </a:p>
-        </p:txBody>
-      </p:sp>
-      <p:pic>
-        <p:nvPicPr>
-          <p:cNvPr id="23" name="아이콘:package" descr="package_13294B_1.6.png"/>
-          <p:cNvPicPr>
-            <a:picLocks noChangeAspect="1"/>
-          </p:cNvPicPr>
-          <p:nvPr/>
-        </p:nvPicPr>
-        <p:blipFill>
-          <a:blip r:embed="rId6"/>
-          <a:stretch>
-            <a:fillRect/>
-          </a:stretch>
-        </p:blipFill>
-        <p:spPr>
-          <a:xfrm>
-            <a:off x="8179399" y="2666250"/>
-            <a:ext cx="424281" cy="424281"/>
-          </a:xfrm>
-          <a:prstGeom prst="rect">
-            <a:avLst/>
-          </a:prstGeom>
-        </p:spPr>
-      </p:pic>
-      <p:sp>
-        <p:nvSpPr>
-          <p:cNvPr id="24" name="TextBox 23"/>
-          <p:cNvSpPr txBox="1"/>
-          <p:nvPr/>
-        </p:nvSpPr>
-        <p:spPr>
-          <a:xfrm>
-            <a:off x="7508869" y="3317303"/>
-            <a:ext cx="1765340" cy="2262504"/>
-          </a:xfrm>
-          <a:prstGeom prst="rect">
-            <a:avLst/>
-          </a:prstGeom>
-          <a:noFill/>
-        </p:spPr>
-        <p:txBody>
-          <a:bodyPr wrap="square" anchor="t"/>
-          <a:lstStyle/>
-          <a:p>
-            <a:pPr algn="ctr" eaLnBrk="0">
-              <a:lnSpc>
-                <a:spcPct val="110000"/>
-              </a:lnSpc>
-              <a:spcAft>
-                <a:spcPts val="400"/>
-              </a:spcAft>
-            </a:pPr>
-            <a:r>
-              <a:rPr sz="1550" b="1">
-                <a:solidFill>
-                  <a:srgbClr val="13294B"/>
-                </a:solidFill>
-                <a:latin typeface="맑은 고딕"/>
-                <a:ea typeface="맑은 고딕"/>
-                <a:cs typeface="맑은 고딕"/>
-              </a:rPr>
-              <a:t>승인 뒤</a:t>
-            </a:r>
-          </a:p>
-          <a:p>
-            <a:pPr algn="ctr" eaLnBrk="0">
-              <a:lnSpc>
-                <a:spcPct val="110000"/>
-              </a:lnSpc>
-              <a:spcAft>
-                <a:spcPts val="400"/>
-              </a:spcAft>
-            </a:pPr>
-            <a:r>
-              <a:rPr sz="1250" b="0">
-                <a:solidFill>
-                  <a:srgbClr val="1F2A3A"/>
-                </a:solidFill>
-                <a:latin typeface="맑은 고딕"/>
-                <a:ea typeface="맑은 고딕"/>
-                <a:cs typeface="맑은 고딕"/>
-              </a:rPr>
-              <a:t>ERP 발주,</a:t>
-            </a:r>
-          </a:p>
-          <a:p>
-            <a:pPr algn="ctr" eaLnBrk="0">
-              <a:lnSpc>
-                <a:spcPct val="110000"/>
-              </a:lnSpc>
-              <a:spcAft>
-                <a:spcPts val="400"/>
-              </a:spcAft>
-            </a:pPr>
-            <a:r>
-              <a:rPr sz="1250" b="0">
-                <a:solidFill>
-                  <a:srgbClr val="1F2A3A"/>
-                </a:solidFill>
-                <a:latin typeface="맑은 고딕"/>
-                <a:ea typeface="맑은 고딕"/>
-                <a:cs typeface="맑은 고딕"/>
-              </a:rPr>
-              <a:t>공급사 통지,</a:t>
-            </a:r>
-          </a:p>
-          <a:p>
-            <a:pPr algn="ctr" eaLnBrk="0">
-              <a:lnSpc>
-                <a:spcPct val="110000"/>
-              </a:lnSpc>
-              <a:spcAft>
-                <a:spcPts val="400"/>
-              </a:spcAft>
-            </a:pPr>
-            <a:r>
-              <a:rPr sz="1250" b="0">
-                <a:solidFill>
-                  <a:srgbClr val="1F2A3A"/>
-                </a:solidFill>
-                <a:latin typeface="맑은 고딕"/>
-                <a:ea typeface="맑은 고딕"/>
-                <a:cs typeface="맑은 고딕"/>
-              </a:rPr>
-              <a:t>입고와 재고 반영</a:t>
-            </a:r>
-          </a:p>
-          <a:p>
-            <a:pPr algn="ctr" eaLnBrk="0">
-              <a:lnSpc>
-                <a:spcPct val="110000"/>
-              </a:lnSpc>
-              <a:spcAft>
-                <a:spcPts val="400"/>
-              </a:spcAft>
-            </a:pPr>
-            <a:r>
-              <a:rPr sz="1250" b="0">
-                <a:solidFill>
-                  <a:srgbClr val="1F2A3A"/>
-                </a:solidFill>
-                <a:latin typeface="맑은 고딕"/>
-                <a:ea typeface="맑은 고딕"/>
-                <a:cs typeface="맑은 고딕"/>
-              </a:rPr>
-              <a:t>수업에서는 입고를 즉시 모의 처리</a:t>
-            </a:r>
-          </a:p>
-        </p:txBody>
-      </p:sp>
-      <p:sp>
-        <p:nvSpPr>
-          <p:cNvPr id="25" name="Right Arrow 24"/>
-          <p:cNvSpPr/>
-          <p:nvPr/>
-        </p:nvSpPr>
-        <p:spPr>
-          <a:xfrm>
-            <a:off x="9411370" y="3854196"/>
-            <a:ext cx="256031" cy="274320"/>
-          </a:xfrm>
-          <a:prstGeom prst="rightArrow">
-            <a:avLst/>
-          </a:prstGeom>
-          <a:solidFill>
-            <a:srgbClr val="13294B"/>
-          </a:solidFill>
-          <a:ln>
-            <a:noFill/>
-          </a:ln>
-        </p:spPr>
-        <p:txBody>
-          <a:bodyPr rtlCol="0" anchor="ctr"/>
-          <a:lstStyle/>
-          <a:p>
-            <a:pPr algn="ctr"/>
-          </a:p>
-        </p:txBody>
-      </p:sp>
-      <p:sp>
-        <p:nvSpPr>
-          <p:cNvPr id="26" name="Rounded Rectangle 25"/>
-          <p:cNvSpPr/>
-          <p:nvPr/>
-        </p:nvSpPr>
-        <p:spPr>
-          <a:xfrm>
-            <a:off x="9731410" y="2329751"/>
-            <a:ext cx="1911644" cy="3323208"/>
-          </a:xfrm>
-          <a:prstGeom prst="roundRect">
-            <a:avLst>
-              <a:gd name="adj" fmla="val 5000"/>
+              <a:gd name="adj" fmla="val 6000"/>
             </a:avLst>
           </a:prstGeom>
           <a:solidFill>
             <a:srgbClr val="E7F3FD"/>
           </a:solidFill>
-          <a:ln w="25400">
+          <a:ln w="12700">
             <a:solidFill>
-              <a:srgbClr val="5CB8F2"/>
+              <a:srgbClr val="D3D9E1"/>
             </a:solidFill>
           </a:ln>
         </p:spPr>
@@ -33366,67 +33138,14 @@
       </p:sp>
       <p:sp>
         <p:nvSpPr>
-          <p:cNvPr id="27" name="Oval 26"/>
-          <p:cNvSpPr/>
-          <p:nvPr/>
-        </p:nvSpPr>
-        <p:spPr>
-          <a:xfrm>
-            <a:off x="10321472" y="2512631"/>
-            <a:ext cx="731520" cy="731520"/>
-          </a:xfrm>
-          <a:prstGeom prst="ellipse">
-            <a:avLst/>
-          </a:prstGeom>
-          <a:solidFill>
-            <a:srgbClr val="5CB8F2"/>
-          </a:solidFill>
-          <a:ln>
-            <a:noFill/>
-          </a:ln>
-        </p:spPr>
-        <p:txBody>
-          <a:bodyPr rtlCol="0" anchor="ctr"/>
-          <a:lstStyle/>
-          <a:p>
-            <a:pPr algn="ctr"/>
-          </a:p>
-        </p:txBody>
-      </p:sp>
-      <p:pic>
-        <p:nvPicPr>
-          <p:cNvPr id="28" name="아이콘:file-text" descr="file-text_13294B_1.6.png"/>
-          <p:cNvPicPr>
-            <a:picLocks noChangeAspect="1"/>
-          </p:cNvPicPr>
-          <p:nvPr/>
-        </p:nvPicPr>
-        <p:blipFill>
-          <a:blip r:embed="rId7"/>
-          <a:stretch>
-            <a:fillRect/>
-          </a:stretch>
-        </p:blipFill>
-        <p:spPr>
-          <a:xfrm>
-            <a:off x="10475092" y="2666250"/>
-            <a:ext cx="424281" cy="424281"/>
-          </a:xfrm>
-          <a:prstGeom prst="rect">
-            <a:avLst/>
-          </a:prstGeom>
-        </p:spPr>
-      </p:pic>
-      <p:sp>
-        <p:nvSpPr>
-          <p:cNvPr id="29" name="TextBox 28"/>
-          <p:cNvSpPr txBox="1"/>
-          <p:nvPr/>
-        </p:nvSpPr>
-        <p:spPr>
-          <a:xfrm>
-            <a:off x="9804562" y="3317303"/>
-            <a:ext cx="1765340" cy="2262504"/>
+          <p:cNvPr id="26" name="TextBox 25"/>
+          <p:cNvSpPr txBox="1"/>
+          <p:nvPr/>
+        </p:nvSpPr>
+        <p:spPr>
+          <a:xfrm>
+            <a:off x="822960" y="5349240"/>
+            <a:ext cx="2011680" cy="365760"/>
           </a:xfrm>
           <a:prstGeom prst="rect">
             <a:avLst/>
@@ -33437,16 +33156,13 @@
           <a:bodyPr wrap="square" anchor="t"/>
           <a:lstStyle/>
           <a:p>
-            <a:pPr algn="ctr" eaLnBrk="0">
-              <a:lnSpc>
-                <a:spcPct val="110000"/>
-              </a:lnSpc>
-              <a:spcAft>
-                <a:spcPts val="400"/>
-              </a:spcAft>
-            </a:pPr>
-            <a:r>
-              <a:rPr sz="1550" b="1">
+            <a:pPr algn="l" eaLnBrk="0">
+              <a:lnSpc>
+                <a:spcPct val="110000"/>
+              </a:lnSpc>
+            </a:pPr>
+            <a:r>
+              <a:rPr sz="2000" b="1">
                 <a:solidFill>
                   <a:srgbClr val="13294B"/>
                 </a:solidFill>
@@ -33457,68 +33173,72 @@
               <a:t>성공 기준</a:t>
             </a:r>
           </a:p>
-          <a:p>
-            <a:pPr algn="ctr" eaLnBrk="0">
-              <a:lnSpc>
-                <a:spcPct val="110000"/>
-              </a:lnSpc>
-              <a:spcAft>
-                <a:spcPts val="400"/>
-              </a:spcAft>
-            </a:pPr>
-            <a:r>
-              <a:rPr sz="1250" b="0">
-                <a:solidFill>
-                  <a:srgbClr val="1F2A3A"/>
-                </a:solidFill>
-                <a:latin typeface="맑은 고딕"/>
-                <a:ea typeface="맑은 고딕"/>
-                <a:cs typeface="맑은 고딕"/>
-              </a:rPr>
-              <a:t>시작 값·승인 수량으로 대조</a:t>
-            </a:r>
-          </a:p>
-          <a:p>
-            <a:pPr algn="ctr" eaLnBrk="0">
-              <a:lnSpc>
-                <a:spcPct val="110000"/>
-              </a:lnSpc>
-              <a:spcAft>
-                <a:spcPts val="400"/>
-              </a:spcAft>
-            </a:pPr>
-            <a:r>
-              <a:rPr sz="1250" b="0">
-                <a:solidFill>
-                  <a:srgbClr val="1F2A3A"/>
-                </a:solidFill>
-                <a:latin typeface="맑은 고딕"/>
-                <a:ea typeface="맑은 고딕"/>
-                <a:cs typeface="맑은 고딕"/>
-              </a:rPr>
-              <a:t>예: 가용 재고 1→7개</a:t>
-            </a:r>
-          </a:p>
-          <a:p>
-            <a:pPr algn="ctr" eaLnBrk="0">
-              <a:lnSpc>
-                <a:spcPct val="110000"/>
-              </a:lnSpc>
-              <a:spcAft>
-                <a:spcPts val="400"/>
-              </a:spcAft>
-            </a:pPr>
-            <a:r>
-              <a:rPr sz="1250" b="0">
-                <a:solidFill>
-                  <a:srgbClr val="1F2A3A"/>
-                </a:solidFill>
-                <a:latin typeface="맑은 고딕"/>
-                <a:ea typeface="맑은 고딕"/>
-                <a:cs typeface="맑은 고딕"/>
-              </a:rPr>
-              <a:t>결과 보고: 입고 완료</a:t>
-            </a:r>
+        </p:txBody>
+      </p:sp>
+      <p:sp>
+        <p:nvSpPr>
+          <p:cNvPr id="27" name="TextBox 26"/>
+          <p:cNvSpPr txBox="1"/>
+          <p:nvPr/>
+        </p:nvSpPr>
+        <p:spPr>
+          <a:xfrm>
+            <a:off x="2880360" y="5321808"/>
+            <a:ext cx="8412480" cy="594360"/>
+          </a:xfrm>
+          <a:prstGeom prst="rect">
+            <a:avLst/>
+          </a:prstGeom>
+          <a:noFill/>
+        </p:spPr>
+        <p:txBody>
+          <a:bodyPr wrap="square" anchor="t"/>
+          <a:lstStyle/>
+          <a:p>
+            <a:pPr algn="l" eaLnBrk="0">
+              <a:lnSpc>
+                <a:spcPct val="110000"/>
+              </a:lnSpc>
+            </a:pPr>
+            <a:r>
+              <a:rPr sz="1700" b="0">
+                <a:solidFill>
+                  <a:srgbClr val="13294B"/>
+                </a:solidFill>
+                <a:latin typeface="맑은 고딕"/>
+                <a:ea typeface="맑은 고딕"/>
+                <a:cs typeface="맑은 고딕"/>
+              </a:rPr>
+              <a:t>시작 값·승인 수량으로 대조 · 예: 가용 재고 1→7개 · 결과 보고: 입고 완료</a:t>
+            </a:r>
+          </a:p>
+        </p:txBody>
+      </p:sp>
+      <p:sp>
+        <p:nvSpPr>
+          <p:cNvPr id="28" name="TextBox 27"/>
+          <p:cNvSpPr txBox="1"/>
+          <p:nvPr/>
+        </p:nvSpPr>
+        <p:spPr>
+          <a:xfrm>
+            <a:off x="9326880" y="5404104"/>
+            <a:ext cx="2011680" cy="365760"/>
+          </a:xfrm>
+          <a:prstGeom prst="rect">
+            <a:avLst/>
+          </a:prstGeom>
+          <a:noFill/>
+        </p:spPr>
+        <p:txBody>
+          <a:bodyPr wrap="square" anchor="t"/>
+          <a:lstStyle/>
+          <a:p>
+            <a:pPr algn="l" eaLnBrk="0">
+              <a:lnSpc>
+                <a:spcPct val="110000"/>
+              </a:lnSpc>
+            </a:pPr>
           </a:p>
         </p:txBody>
       </p:sp>

--- a/산출물/실전반/이론/07회차/실전반_07일차.pptx
+++ b/산출물/실전반/이론/07회차/실전반_07일차.pptx
@@ -16754,14 +16754,14 @@
       </p:sp>
       <p:pic>
         <p:nvPicPr>
-          <p:cNvPr id="6" name="삽화:병목.svg" descr="illust_185130019612925900_1792237476.png"/>
+          <p:cNvPr id="6" name="삽화:병목.svg" descr="illust_3978690997637168397_1792237476.png"/>
           <p:cNvPicPr>
             <a:picLocks noChangeAspect="1"/>
           </p:cNvPicPr>
           <p:nvPr/>
         </p:nvPicPr>
         <p:blipFill>
-          <a:blip r:embed="rId3"/>
+          <a:blip r:embed="rIdTheory18_rId3"/>
           <a:stretch>
             <a:fillRect/>
           </a:stretch>
@@ -17078,8 +17078,8 @@
         </p:nvSpPr>
         <p:spPr>
           <a:xfrm>
-            <a:off x="4699432" y="3816440"/>
-            <a:ext cx="1527329" cy="546353"/>
+            <a:off x="4590337" y="3816440"/>
+            <a:ext cx="1745519" cy="507618"/>
           </a:xfrm>
           <a:prstGeom prst="rect">
             <a:avLst/>
@@ -17107,7 +17107,28 @@
                 <a:ea typeface="맑은 고딕"/>
                 <a:cs typeface="맑은 고딕"/>
               </a:rPr>
-              <a:t>설비보전팀장 승인</a:t>
+              <a:t>설비보전팀장</a:t>
+            </a:r>
+          </a:p>
+          <a:p>
+            <a:pPr algn="ctr" eaLnBrk="0">
+              <a:lnSpc>
+                <a:spcPct val="110000"/>
+              </a:lnSpc>
+              <a:spcAft>
+                <a:spcPts val="100"/>
+              </a:spcAft>
+            </a:pPr>
+            <a:r>
+              <a:rPr sz="1100" b="0">
+                <a:solidFill>
+                  <a:srgbClr val="556175"/>
+                </a:solidFill>
+                <a:latin typeface="맑은 고딕"/>
+                <a:ea typeface="맑은 고딕"/>
+                <a:cs typeface="맑은 고딕"/>
+              </a:rPr>
+              <a:t>승인</a:t>
             </a:r>
           </a:p>
         </p:txBody>
@@ -20532,14 +20553,14 @@
       </p:sp>
       <p:pic>
         <p:nvPicPr>
-          <p:cNvPr id="6" name="삽화:세흐름_나란히.svg" descr="illust_1983060794510232042_1792130363.png"/>
+          <p:cNvPr id="6" name="삽화:세흐름_나란히.svg" descr="illust_634043060407935814_1792130363.png"/>
           <p:cNvPicPr>
             <a:picLocks noChangeAspect="1"/>
           </p:cNvPicPr>
           <p:nvPr/>
         </p:nvPicPr>
         <p:blipFill>
-          <a:blip r:embed="rId3"/>
+          <a:blip r:embed="rIdTheory22_rId3"/>
           <a:stretch>
             <a:fillRect/>
           </a:stretch>
@@ -20856,8 +20877,8 @@
         </p:nvSpPr>
         <p:spPr>
           <a:xfrm>
-            <a:off x="1732049" y="3778620"/>
-            <a:ext cx="1265501" cy="546353"/>
+            <a:off x="1732049" y="3684071"/>
+            <a:ext cx="1265501" cy="507618"/>
           </a:xfrm>
           <a:prstGeom prst="rect">
             <a:avLst/>
@@ -20885,7 +20906,28 @@
                 <a:ea typeface="맑은 고딕"/>
                 <a:cs typeface="맑은 고딕"/>
               </a:rPr>
-              <a:t>정비 계획 제안</a:t>
+              <a:t>정비 계획</a:t>
+            </a:r>
+          </a:p>
+          <a:p>
+            <a:pPr algn="ctr" eaLnBrk="0">
+              <a:lnSpc>
+                <a:spcPct val="110000"/>
+              </a:lnSpc>
+              <a:spcAft>
+                <a:spcPts val="100"/>
+              </a:spcAft>
+            </a:pPr>
+            <a:r>
+              <a:rPr sz="1100" b="0">
+                <a:solidFill>
+                  <a:srgbClr val="556175"/>
+                </a:solidFill>
+                <a:latin typeface="맑은 고딕"/>
+                <a:ea typeface="맑은 고딕"/>
+                <a:cs typeface="맑은 고딕"/>
+              </a:rPr>
+              <a:t>제안</a:t>
             </a:r>
           </a:p>
         </p:txBody>
@@ -22971,14 +23013,14 @@
       </p:sp>
       <p:pic>
         <p:nvPicPr>
-          <p:cNvPr id="6" name="삽화:흐름_정기점검.svg" descr="illust_1995270787414910775_1792237476.png"/>
+          <p:cNvPr id="6" name="삽화:흐름_정기점검.svg" descr="illust_3532887179629428552_1792237476.png"/>
           <p:cNvPicPr>
             <a:picLocks noChangeAspect="1"/>
           </p:cNvPicPr>
           <p:nvPr/>
         </p:nvPicPr>
         <p:blipFill>
-          <a:blip r:embed="rId3"/>
+          <a:blip r:embed="rIdTheory25_rId3"/>
           <a:stretch>
             <a:fillRect/>
           </a:stretch>
@@ -23338,7 +23380,7 @@
         <p:spPr>
           <a:xfrm>
             <a:off x="4623065" y="4085904"/>
-            <a:ext cx="1309139" cy="546353"/>
+            <a:ext cx="1309139" cy="507618"/>
           </a:xfrm>
           <a:prstGeom prst="rect">
             <a:avLst/>
@@ -23366,7 +23408,28 @@
                 <a:ea typeface="맑은 고딕"/>
                 <a:cs typeface="맑은 고딕"/>
               </a:rPr>
-              <a:t>정비 오더 · 공지 메일</a:t>
+              <a:t>정비 오더</a:t>
+            </a:r>
+          </a:p>
+          <a:p>
+            <a:pPr algn="ctr" eaLnBrk="0">
+              <a:lnSpc>
+                <a:spcPct val="110000"/>
+              </a:lnSpc>
+              <a:spcAft>
+                <a:spcPts val="100"/>
+              </a:spcAft>
+            </a:pPr>
+            <a:r>
+              <a:rPr sz="1100" b="0">
+                <a:solidFill>
+                  <a:srgbClr val="556175"/>
+                </a:solidFill>
+                <a:latin typeface="맑은 고딕"/>
+                <a:ea typeface="맑은 고딕"/>
+                <a:cs typeface="맑은 고딕"/>
+              </a:rPr>
+              <a:t>공지 메일</a:t>
             </a:r>
           </a:p>
         </p:txBody>

--- a/산출물/실전반/이론/07회차/실전반_07일차.pptx
+++ b/산출물/실전반/이론/07회차/실전반_07일차.pptx
@@ -3112,57 +3112,27 @@
           <a:lstStyle/>
           <a:p>
             <a:r>
-              <a:t>[짚을 곳] 표 다섯 줄(자리) → 가운데 칸 두 줄(정기 점검</a:t>
-            </a:r>
-          </a:p>
-          <a:p>
-            <a:r>
-              <a:t>재고 보충) → 오른쪽 맡는 쪽 → 강조한 마지막 줄</a:t>
-            </a:r>
-          </a:p>
-          <a:p>
-            <a:r>
-              <a:t>· 시작: c3_pm.28d73c7a… 도래 PM_DUE · HYD-02</a:t>
-            </a:r>
-          </a:p>
-          <a:p>
-            <a:r>
-              <a:t>c3_spare.8b48bf5f… 재고 부족</a:t>
-            </a:r>
-          </a:p>
-          <a:p>
-            <a:r>
-              <a:t>· 판단: 「야간 정비 시간」 DEC-1010-044-c3ec</a:t>
-            </a:r>
-          </a:p>
-          <a:p>
-            <a:r>
-              <a:t>6개 · B-OEM · 330만원 DEC-1010-048-618d</a:t>
-            </a:r>
-          </a:p>
-          <a:p>
-            <a:r>
-              <a:t>· 사람: 설비보전팀장 승인</a:t>
-            </a:r>
-          </a:p>
-          <a:p>
-            <a:r>
-              <a:t>구매 담당 승인</a:t>
-            </a:r>
-          </a:p>
-          <a:p>
-            <a:r>
-              <a:t>· 시스템: 오더 WO-1010-5DDD · 공지</a:t>
-            </a:r>
-          </a:p>
-          <a:p>
-            <a:r>
-              <a:t>발주 PR-1010-83F3 · 메일 · 입고 GR-1010-4EE3, 종료: E_end 정상</a:t>
-            </a:r>
-          </a:p>
-          <a:p>
-            <a:r>
-              <a:t>입고 완료</a:t>
+              <a:t>[짚을 곳] 표 다섯 줄(자리) → 가운데 칸 두 줄(정기 점검/재고 보충) → 오른쪽 맡는 쪽 → 강조한 마지막 줄</a:t>
+            </a:r>
+          </a:p>
+          <a:p>
+            <a:r>
+              <a:t>· 시작: c3_pm.28d73c7a… 도래 PM_DUE · HYD-02/c3_spare.8b48bf5f… 재고 부족</a:t>
+            </a:r>
+          </a:p>
+          <a:p>
+            <a:r>
+              <a:t>· 판단: 「야간 정비 시간」 DEC-1010-044-c3ec/6개 · B-OEM · 330만원 DEC-1010-048-618d</a:t>
+            </a:r>
+          </a:p>
+          <a:p>
+            <a:r>
+              <a:t>· 사람: 설비보전팀장 승인/구매 담당 승인</a:t>
+            </a:r>
+          </a:p>
+          <a:p>
+            <a:r>
+              <a:t>· 시스템: 오더 WO-1010-5DDD · 공지/발주 PR-1010-83F3 · 메일 · 입고 GR-1010-4EE3, 종료: E_end 정상/입고 완료</a:t>
             </a:r>
           </a:p>
           <a:p>
@@ -3667,12 +3637,7 @@
           <a:lstStyle/>
           <a:p>
             <a:r>
-              <a:t>[짚을 곳] 표 다섯 줄 → 가운데 칸 두 줄(처리 건</a:t>
-            </a:r>
-          </a:p>
-          <a:p>
-            <a:r>
-              <a:t>업무 시스템) → 오른쪽 남는 확인 → 강조한 마지막 줄</a:t>
+              <a:t>[짚을 곳] 표 다섯 줄 → 가운데 칸 두 줄(처리 건/업무 시스템) → 오른쪽 남는 확인 → 강조한 마지막 줄</a:t>
             </a:r>
           </a:p>
           <a:p>
@@ -4672,17 +4637,7 @@
           </a:p>
           <a:p>
             <a:r>
-              <a:t>· 남는 결과가 다르다: 명령 · 작업지시</a:t>
-            </a:r>
-          </a:p>
-          <a:p>
-            <a:r>
-              <a:t>오더 · 공지</a:t>
-            </a:r>
-          </a:p>
-          <a:p>
-            <a:r>
-              <a:t>발주 · 입고</a:t>
+              <a:t>· 남는 결과가 다르다: 명령 · 작업지시/오더 · 공지/발주 · 입고</a:t>
             </a:r>
           </a:p>
           <a:p>

--- a/산출물/실전반/이론/07회차/실전반_07일차.pptx
+++ b/산출물/실전반/이론/07회차/실전반_07일차.pptx
@@ -1152,7 +1152,7 @@
           </a:p>
           <a:p>
             <a:r>
-              <a:t>· 승인 블록: 승인 작업 · 승인? 갈림 · 지연 타이머 · 지연 알림 · 거절 보고 · 거절 종결을 묶어 부르는 이름</a:t>
+              <a:t>· 승인 블록: 승인 작업 · 승인? 갈림 · 지연 타이머 · 지연 알림 · 알림 끝 · 거절 보고 · 거절 종결, 일곱 요소를 묶어 부르는 이름</a:t>
             </a:r>
           </a:p>
           <a:p>
@@ -13307,7 +13307,7 @@
                 <a:ea typeface="맑은 고딕"/>
                 <a:cs typeface="맑은 고딕"/>
               </a:rPr>
-              <a:t>지연 알림 · 거절 보고 · 거절 종결</a:t>
+              <a:t>지연 알림 · 알림 끝 · 거절 보고 · 거절 종결</a:t>
             </a:r>
           </a:p>
         </p:txBody>

--- a/산출물/실전반/이론/07회차/실전반_07일차.pptx
+++ b/산출물/실전반/이론/07회차/실전반_07일차.pptx
@@ -1767,7 +1767,7 @@
           </a:p>
           <a:p>
             <a:r>
-              <a:t>· 되돌리기: 같은 사용 공간의 사용자 흐름을 모두 내리고 기준 흐름으로, 내 것만이 아님 → 운영자와 시점 맞추기</a:t>
+              <a:t>· 되돌리기(포털 버튼 이름 「기준 흐름으로 되돌리기」): 같은 사용 공간의 사용자 흐름을 모두 내림, 강사가 배포한 수업 흐름은 남고 배포된 흐름이 없는 패턴은 원래의 기준 흐름 쪽으로, 내 것만이 아님 → 운영자와 시점 맞추기</a:t>
             </a:r>
           </a:p>
           <a:p>
@@ -19272,7 +19272,25 @@
                 <a:ea typeface="맑은 고딕"/>
                 <a:cs typeface="맑은 고딕"/>
               </a:rPr>
-              <a:t>경보 경로에서 모두 내리고 기준 흐름으로</a:t>
+              <a:t>경보 경로에서 모두 내린다</a:t>
+            </a:r>
+          </a:p>
+          <a:p>
+            <a:pPr algn="l" eaLnBrk="0">
+              <a:lnSpc>
+                <a:spcPct val="110000"/>
+              </a:lnSpc>
+            </a:pPr>
+            <a:r>
+              <a:rPr sz="1400" b="0">
+                <a:solidFill>
+                  <a:srgbClr val="1F2A3A"/>
+                </a:solidFill>
+                <a:latin typeface="맑은 고딕"/>
+                <a:ea typeface="맑은 고딕"/>
+                <a:cs typeface="맑은 고딕"/>
+              </a:rPr>
+              <a:t>강사가 배포한 수업 흐름은 남는다</a:t>
             </a:r>
           </a:p>
         </p:txBody>
